--- a/cpu/docs/presentations/output/RV32I_CPU_Bunea_Cosmin-Andrei_v2.pptx
+++ b/cpu/docs/presentations/output/RV32I_CPU_Bunea_Cosmin-Andrei_v2.pptx
@@ -2,20 +2,20 @@
 <file path=ppt/presentation.xml><?xml version="1.0" encoding="utf-8"?>
 <p:presentation xmlns:p="http://schemas.openxmlformats.org/presentationml/2006/main">
   <p:sldMasterIdLst>
-    <p:sldMasterId xmlns:r="http://schemas.openxmlformats.org/officeDocument/2006/relationships" id="2147483648" r:id="R99b238b7b3444a76"/>
+    <p:sldMasterId xmlns:r="http://schemas.openxmlformats.org/officeDocument/2006/relationships" id="2147483648" r:id="Rfba2ea02e9e1405a"/>
   </p:sldMasterIdLst>
   <p:notesMasterIdLst>
-    <p:notesMasterId xmlns:r="http://schemas.openxmlformats.org/officeDocument/2006/relationships" r:id="R1e8fd48e40794176"/>
+    <p:notesMasterId xmlns:r="http://schemas.openxmlformats.org/officeDocument/2006/relationships" r:id="R606cce4e665a4003"/>
   </p:notesMasterIdLst>
   <p:sldIdLst>
-    <p:sldId xmlns:r="http://schemas.openxmlformats.org/officeDocument/2006/relationships" id="256" r:id="Re940096504914516"/>
-    <p:sldId xmlns:r="http://schemas.openxmlformats.org/officeDocument/2006/relationships" id="257" r:id="R38ec1085f84f4f21"/>
-    <p:sldId xmlns:r="http://schemas.openxmlformats.org/officeDocument/2006/relationships" id="258" r:id="R39d36d91f584481e"/>
-    <p:sldId xmlns:r="http://schemas.openxmlformats.org/officeDocument/2006/relationships" id="259" r:id="R7ffd35ebf42c4ecf"/>
-    <p:sldId xmlns:r="http://schemas.openxmlformats.org/officeDocument/2006/relationships" id="260" r:id="Ra25105cb80fc486f"/>
-    <p:sldId xmlns:r="http://schemas.openxmlformats.org/officeDocument/2006/relationships" id="261" r:id="R73726a9b3ddb42f3"/>
-    <p:sldId xmlns:r="http://schemas.openxmlformats.org/officeDocument/2006/relationships" id="262" r:id="R078600ee5c2a446a"/>
-    <p:sldId xmlns:r="http://schemas.openxmlformats.org/officeDocument/2006/relationships" id="263" r:id="Raf34af365f3e4394"/>
+    <p:sldId xmlns:r="http://schemas.openxmlformats.org/officeDocument/2006/relationships" id="256" r:id="Rd988b1d290874e0b"/>
+    <p:sldId xmlns:r="http://schemas.openxmlformats.org/officeDocument/2006/relationships" id="257" r:id="R45f29a8e968c4881"/>
+    <p:sldId xmlns:r="http://schemas.openxmlformats.org/officeDocument/2006/relationships" id="258" r:id="R2e6c8cec9ebb4f17"/>
+    <p:sldId xmlns:r="http://schemas.openxmlformats.org/officeDocument/2006/relationships" id="259" r:id="Rd65db7282b364012"/>
+    <p:sldId xmlns:r="http://schemas.openxmlformats.org/officeDocument/2006/relationships" id="260" r:id="Ra2d2c32998d4406e"/>
+    <p:sldId xmlns:r="http://schemas.openxmlformats.org/officeDocument/2006/relationships" id="261" r:id="Rd85a189ada644cbd"/>
+    <p:sldId xmlns:r="http://schemas.openxmlformats.org/officeDocument/2006/relationships" id="262" r:id="Rad88c3b2beb34b28"/>
+    <p:sldId xmlns:r="http://schemas.openxmlformats.org/officeDocument/2006/relationships" id="263" r:id="Re75698088cea4bb4"/>
   </p:sldIdLst>
   <p:sldSz cx="18288000" cy="10287000"/>
   <p:notesSz cx="6858000" cy="9144000"/>
@@ -848,7 +848,7 @@
           <a:lstStyle xmlns:a="http://schemas.openxmlformats.org/drawingml/2006/main"/>
           <a:p xmlns:a="http://schemas.openxmlformats.org/drawingml/2006/main">
             <a:r>
-              <a:t>1:30. Stimulus and program go into the DUT; expected values and observations go into the checks. The ISA model is written separately from the RTL and gives the expected state after each of 1,287 instructions. The memories add delay and backpressure, so the same program also exercises stalls. Assertions are attached with bind and check pipeline and AXI rules. The mutation suite inserts a known defect into the RTL and requires a named bench to fail; all 16 are rejected.</a:t>
+              <a:t>1:30. Stimulus and program go into the DUT; expected values and observations go into the checks. The ISA model is written separately from the RTL and gives the expected state after each instruction: a directed program and ten random ones, 49,149 instructions in all. The memories add delay and backpressure, so the same program also exercises stalls. Assertions are attached with bind and check pipeline and AXI rules. The mutation suite inserts a known defect into the RTL and requires a named bench to fail; all 25 are rejected.</a:t>
             </a:r>
           </a:p>
         </p:txBody>
@@ -1056,7 +1056,7 @@
   </p:cSld>
   <p:clrMap bg1="lt1" tx1="dk1" bg2="lt2" tx2="dk2" accent1="accent1" accent2="accent2" accent3="accent3" accent4="accent4" accent5="accent5" accent6="accent6" hlink="hlink" folHlink="folHlink"/>
   <p:sldLayoutIdLst>
-    <p:sldLayoutId xmlns:r="http://schemas.openxmlformats.org/officeDocument/2006/relationships" id="2147483649" r:id="R9e9d27a677c640cd"/>
+    <p:sldLayoutId xmlns:r="http://schemas.openxmlformats.org/officeDocument/2006/relationships" id="2147483649" r:id="Re3593af2f68b45d7"/>
   </p:sldLayoutIdLst>
   <p:txStyles>
     <p:titleStyle>
@@ -1355,7 +1355,7 @@
           <p:cNvPr id="1" name="">
             <a:extLst xmlns:a="http://schemas.openxmlformats.org/drawingml/2006/main">
               <a:ext uri="{FF2B5EF4-FFF2-40B4-BE49-F238E27FC236}">
-                <a16:creationId xmlns:a16="http://schemas.microsoft.com/office/drawing/2014/main" id="{E07E08B8-4DBD-40AA-B275-DA9EEF46302C}"/>
+                <a16:creationId xmlns:a16="http://schemas.microsoft.com/office/drawing/2014/main" id="{34C026AB-3AEC-48F0-ADE7-A722E173252B}"/>
               </a:ext>
             </a:extLst>
           </p:cNvPr>
@@ -1400,7 +1400,7 @@
           <p:cNvPr id="2" name="">
             <a:extLst xmlns:a="http://schemas.openxmlformats.org/drawingml/2006/main">
               <a:ext uri="{FF2B5EF4-FFF2-40B4-BE49-F238E27FC236}">
-                <a16:creationId xmlns:a16="http://schemas.microsoft.com/office/drawing/2014/main" id="{DC708D46-0E27-4774-9B27-A8CC50FC4C47}"/>
+                <a16:creationId xmlns:a16="http://schemas.microsoft.com/office/drawing/2014/main" id="{0236B2B7-8549-452E-A447-5B35469C4F8D}"/>
               </a:ext>
             </a:extLst>
           </p:cNvPr>
@@ -1433,7 +1433,7 @@
           <p:cNvPr id="3" name="">
             <a:extLst xmlns:a="http://schemas.openxmlformats.org/drawingml/2006/main">
               <a:ext uri="{FF2B5EF4-FFF2-40B4-BE49-F238E27FC236}">
-                <a16:creationId xmlns:a16="http://schemas.microsoft.com/office/drawing/2014/main" id="{95D09299-E883-4B50-B5D4-DB5AFA9DDD29}"/>
+                <a16:creationId xmlns:a16="http://schemas.microsoft.com/office/drawing/2014/main" id="{201C2D83-C8D5-49DA-BEB7-FAF7E2C3301A}"/>
               </a:ext>
             </a:extLst>
           </p:cNvPr>
@@ -1478,7 +1478,7 @@
           <p:cNvPr id="4" name="">
             <a:extLst xmlns:a="http://schemas.openxmlformats.org/drawingml/2006/main">
               <a:ext uri="{FF2B5EF4-FFF2-40B4-BE49-F238E27FC236}">
-                <a16:creationId xmlns:a16="http://schemas.microsoft.com/office/drawing/2014/main" id="{0F62DA00-03A9-4357-B4C8-B2C6D968C5A4}"/>
+                <a16:creationId xmlns:a16="http://schemas.microsoft.com/office/drawing/2014/main" id="{5D6FAA74-3101-44C8-B970-567374C9B570}"/>
               </a:ext>
             </a:extLst>
           </p:cNvPr>
@@ -1523,7 +1523,7 @@
           <p:cNvPr id="5" name="">
             <a:extLst xmlns:a="http://schemas.openxmlformats.org/drawingml/2006/main">
               <a:ext uri="{FF2B5EF4-FFF2-40B4-BE49-F238E27FC236}">
-                <a16:creationId xmlns:a16="http://schemas.microsoft.com/office/drawing/2014/main" id="{75EEA199-4EA0-498F-8521-3CDEE2B8D85F}"/>
+                <a16:creationId xmlns:a16="http://schemas.microsoft.com/office/drawing/2014/main" id="{83E2236F-8396-4AB2-85C8-928886233571}"/>
               </a:ext>
             </a:extLst>
           </p:cNvPr>
@@ -1568,7 +1568,7 @@
           <p:cNvPr id="6" name="">
             <a:extLst xmlns:a="http://schemas.openxmlformats.org/drawingml/2006/main">
               <a:ext uri="{FF2B5EF4-FFF2-40B4-BE49-F238E27FC236}">
-                <a16:creationId xmlns:a16="http://schemas.microsoft.com/office/drawing/2014/main" id="{1E3F9887-4E7A-4647-B0DA-EFA6B3A46A78}"/>
+                <a16:creationId xmlns:a16="http://schemas.microsoft.com/office/drawing/2014/main" id="{729695E3-2150-484C-977E-161AF6A97337}"/>
               </a:ext>
             </a:extLst>
           </p:cNvPr>
@@ -1647,7 +1647,7 @@
           <p:cNvPr id="7" name="">
             <a:extLst xmlns:a="http://schemas.openxmlformats.org/drawingml/2006/main">
               <a:ext uri="{FF2B5EF4-FFF2-40B4-BE49-F238E27FC236}">
-                <a16:creationId xmlns:a16="http://schemas.microsoft.com/office/drawing/2014/main" id="{AEAEC2A8-A362-48D2-854E-CA3193C34108}"/>
+                <a16:creationId xmlns:a16="http://schemas.microsoft.com/office/drawing/2014/main" id="{F191C13E-E39B-4946-A8CF-A48C50C56EC2}"/>
               </a:ext>
             </a:extLst>
           </p:cNvPr>
@@ -1696,10 +1696,10 @@
           <p:nvPr/>
         </p:nvPicPr>
         <p:blipFill>
-          <a:blip xmlns:r="http://schemas.openxmlformats.org/officeDocument/2006/relationships" xmlns:a="http://schemas.openxmlformats.org/drawingml/2006/main" r:embed="Rc6557533bbc24556">
+          <a:blip xmlns:r="http://schemas.openxmlformats.org/officeDocument/2006/relationships" xmlns:a="http://schemas.openxmlformats.org/drawingml/2006/main" r:embed="R18e685d8f09d4e49">
             <a:extLst>
               <a:ext uri="{96DAC541-7B7A-43D3-8B79-37D633B846F1}">
-                <asvg:svgBlip xmlns:asvg="http://schemas.microsoft.com/office/drawing/2016/SVG/main" r:embed="R1b840e77283b4ed3"/>
+                <asvg:svgBlip xmlns:asvg="http://schemas.microsoft.com/office/drawing/2016/SVG/main" r:embed="R896ca16880d84887"/>
               </a:ext>
             </a:extLst>
           </a:blip>
@@ -1718,7 +1718,7 @@
     </p:spTree>
     <p:extLst>
       <p:ext uri="{BB962C8B-B14F-4D97-AF65-F5344CB8AC3E}">
-        <p14:creationId xmlns:p14="http://schemas.microsoft.com/office/powerpoint/2010/main" val="973204141"/>
+        <p14:creationId xmlns:p14="http://schemas.microsoft.com/office/powerpoint/2010/main" val="1795103084"/>
       </p:ext>
     </p:extLst>
   </p:cSld>
@@ -1742,7 +1742,7 @@
           <p:cNvPr id="1" name="slide-title">
             <a:extLst xmlns:a="http://schemas.openxmlformats.org/drawingml/2006/main">
               <a:ext uri="{FF2B5EF4-FFF2-40B4-BE49-F238E27FC236}">
-                <a16:creationId xmlns:a16="http://schemas.microsoft.com/office/drawing/2014/main" id="{3F8E330D-487F-4F80-AECD-BD30DC00B379}"/>
+                <a16:creationId xmlns:a16="http://schemas.microsoft.com/office/drawing/2014/main" id="{8A0C226E-BE7D-4C24-B246-7CD261DA79E2}"/>
               </a:ext>
             </a:extLst>
           </p:cNvPr>
@@ -1787,7 +1787,7 @@
           <p:cNvPr id="2" name="">
             <a:extLst xmlns:a="http://schemas.openxmlformats.org/drawingml/2006/main">
               <a:ext uri="{FF2B5EF4-FFF2-40B4-BE49-F238E27FC236}">
-                <a16:creationId xmlns:a16="http://schemas.microsoft.com/office/drawing/2014/main" id="{B7A16C2C-631C-4609-8308-36E82BFAC74E}"/>
+                <a16:creationId xmlns:a16="http://schemas.microsoft.com/office/drawing/2014/main" id="{B8C501E2-F7C7-42F0-98F1-793F63FBEEC2}"/>
               </a:ext>
             </a:extLst>
           </p:cNvPr>
@@ -1820,7 +1820,7 @@
           <p:cNvPr id="3" name="">
             <a:extLst xmlns:a="http://schemas.openxmlformats.org/drawingml/2006/main">
               <a:ext uri="{FF2B5EF4-FFF2-40B4-BE49-F238E27FC236}">
-                <a16:creationId xmlns:a16="http://schemas.microsoft.com/office/drawing/2014/main" id="{D154A657-6D6E-4F31-A7CE-0A9437A91927}"/>
+                <a16:creationId xmlns:a16="http://schemas.microsoft.com/office/drawing/2014/main" id="{D4AB81C1-BAB0-4EE9-9CF1-9A4DFC286DAD}"/>
               </a:ext>
             </a:extLst>
           </p:cNvPr>
@@ -1849,7 +1849,7 @@
           <p:cNvPr id="4" name="">
             <a:extLst xmlns:a="http://schemas.openxmlformats.org/drawingml/2006/main">
               <a:ext uri="{FF2B5EF4-FFF2-40B4-BE49-F238E27FC236}">
-                <a16:creationId xmlns:a16="http://schemas.microsoft.com/office/drawing/2014/main" id="{DF5068BF-724B-455D-8DD0-6C215F5D956D}"/>
+                <a16:creationId xmlns:a16="http://schemas.microsoft.com/office/drawing/2014/main" id="{4EBAAAE6-E31F-4B83-B56C-E8CDB0DA71E6}"/>
               </a:ext>
             </a:extLst>
           </p:cNvPr>
@@ -1894,7 +1894,7 @@
           <p:cNvPr id="5" name="">
             <a:extLst xmlns:a="http://schemas.openxmlformats.org/drawingml/2006/main">
               <a:ext uri="{FF2B5EF4-FFF2-40B4-BE49-F238E27FC236}">
-                <a16:creationId xmlns:a16="http://schemas.microsoft.com/office/drawing/2014/main" id="{8049D0EA-58C2-41C8-815E-43A7E88053C2}"/>
+                <a16:creationId xmlns:a16="http://schemas.microsoft.com/office/drawing/2014/main" id="{EC662A7D-ABD0-4EA7-B31B-5E097AEE8121}"/>
               </a:ext>
             </a:extLst>
           </p:cNvPr>
@@ -1939,7 +1939,7 @@
           <p:cNvPr id="6" name="">
             <a:extLst xmlns:a="http://schemas.openxmlformats.org/drawingml/2006/main">
               <a:ext uri="{FF2B5EF4-FFF2-40B4-BE49-F238E27FC236}">
-                <a16:creationId xmlns:a16="http://schemas.microsoft.com/office/drawing/2014/main" id="{FF8D030D-52D6-4E3C-86AF-BEA73B754386}"/>
+                <a16:creationId xmlns:a16="http://schemas.microsoft.com/office/drawing/2014/main" id="{51C3A138-83E2-48D5-8CBA-FDE8472C0142}"/>
               </a:ext>
             </a:extLst>
           </p:cNvPr>
@@ -1968,7 +1968,7 @@
           <p:cNvPr id="7" name="">
             <a:extLst xmlns:a="http://schemas.openxmlformats.org/drawingml/2006/main">
               <a:ext uri="{FF2B5EF4-FFF2-40B4-BE49-F238E27FC236}">
-                <a16:creationId xmlns:a16="http://schemas.microsoft.com/office/drawing/2014/main" id="{C6B4EDF0-2D4E-49E6-84AE-467D25A26CB9}"/>
+                <a16:creationId xmlns:a16="http://schemas.microsoft.com/office/drawing/2014/main" id="{34546F70-054B-4E05-82BE-49B4797DFE93}"/>
               </a:ext>
             </a:extLst>
           </p:cNvPr>
@@ -2013,7 +2013,7 @@
           <p:cNvPr id="8" name="">
             <a:extLst xmlns:a="http://schemas.openxmlformats.org/drawingml/2006/main">
               <a:ext uri="{FF2B5EF4-FFF2-40B4-BE49-F238E27FC236}">
-                <a16:creationId xmlns:a16="http://schemas.microsoft.com/office/drawing/2014/main" id="{8A637D22-6B34-47CE-996A-065B407229C8}"/>
+                <a16:creationId xmlns:a16="http://schemas.microsoft.com/office/drawing/2014/main" id="{4CC23BE0-963F-4080-99A4-64462E25DABE}"/>
               </a:ext>
             </a:extLst>
           </p:cNvPr>
@@ -2058,7 +2058,7 @@
           <p:cNvPr id="9" name="">
             <a:extLst xmlns:a="http://schemas.openxmlformats.org/drawingml/2006/main">
               <a:ext uri="{FF2B5EF4-FFF2-40B4-BE49-F238E27FC236}">
-                <a16:creationId xmlns:a16="http://schemas.microsoft.com/office/drawing/2014/main" id="{4CA1DA97-0D71-4466-BC34-01DA2DEBE5A7}"/>
+                <a16:creationId xmlns:a16="http://schemas.microsoft.com/office/drawing/2014/main" id="{CF5C81EF-0B1A-4AE9-9F3B-16A41512073A}"/>
               </a:ext>
             </a:extLst>
           </p:cNvPr>
@@ -2087,7 +2087,7 @@
           <p:cNvPr id="10" name="">
             <a:extLst xmlns:a="http://schemas.openxmlformats.org/drawingml/2006/main">
               <a:ext uri="{FF2B5EF4-FFF2-40B4-BE49-F238E27FC236}">
-                <a16:creationId xmlns:a16="http://schemas.microsoft.com/office/drawing/2014/main" id="{E76C90CB-76D2-42C8-AAA9-F2CB31B56CB5}"/>
+                <a16:creationId xmlns:a16="http://schemas.microsoft.com/office/drawing/2014/main" id="{ECF85033-69B0-41A2-A43C-01F90FBDAA94}"/>
               </a:ext>
             </a:extLst>
           </p:cNvPr>
@@ -2132,7 +2132,7 @@
           <p:cNvPr id="11" name="">
             <a:extLst xmlns:a="http://schemas.openxmlformats.org/drawingml/2006/main">
               <a:ext uri="{FF2B5EF4-FFF2-40B4-BE49-F238E27FC236}">
-                <a16:creationId xmlns:a16="http://schemas.microsoft.com/office/drawing/2014/main" id="{EEEAEE85-2F57-48F7-8D5F-CC22DA0DF4FF}"/>
+                <a16:creationId xmlns:a16="http://schemas.microsoft.com/office/drawing/2014/main" id="{8E191090-B4AE-4E8C-B1EC-947AB2D21B8F}"/>
               </a:ext>
             </a:extLst>
           </p:cNvPr>
@@ -2177,7 +2177,7 @@
           <p:cNvPr id="12" name="">
             <a:extLst xmlns:a="http://schemas.openxmlformats.org/drawingml/2006/main">
               <a:ext uri="{FF2B5EF4-FFF2-40B4-BE49-F238E27FC236}">
-                <a16:creationId xmlns:a16="http://schemas.microsoft.com/office/drawing/2014/main" id="{88E3F007-279B-47D1-9AA3-603B1B1398B5}"/>
+                <a16:creationId xmlns:a16="http://schemas.microsoft.com/office/drawing/2014/main" id="{C2E0DC9B-D7C0-471C-AF74-34F9635B3415}"/>
               </a:ext>
             </a:extLst>
           </p:cNvPr>
@@ -2206,7 +2206,7 @@
           <p:cNvPr id="13" name="">
             <a:extLst xmlns:a="http://schemas.openxmlformats.org/drawingml/2006/main">
               <a:ext uri="{FF2B5EF4-FFF2-40B4-BE49-F238E27FC236}">
-                <a16:creationId xmlns:a16="http://schemas.microsoft.com/office/drawing/2014/main" id="{0B16112D-3556-4D2C-A26C-BBE356E2893E}"/>
+                <a16:creationId xmlns:a16="http://schemas.microsoft.com/office/drawing/2014/main" id="{2111B696-A6AD-4C0D-B80A-FA708F58CC20}"/>
               </a:ext>
             </a:extLst>
           </p:cNvPr>
@@ -2251,7 +2251,7 @@
           <p:cNvPr id="14" name="">
             <a:extLst xmlns:a="http://schemas.openxmlformats.org/drawingml/2006/main">
               <a:ext uri="{FF2B5EF4-FFF2-40B4-BE49-F238E27FC236}">
-                <a16:creationId xmlns:a16="http://schemas.microsoft.com/office/drawing/2014/main" id="{8575D492-9D45-4612-BE8A-68A59B1EF586}"/>
+                <a16:creationId xmlns:a16="http://schemas.microsoft.com/office/drawing/2014/main" id="{308FE41E-8D3D-47DE-8C27-AB7C01B4BB31}"/>
               </a:ext>
             </a:extLst>
           </p:cNvPr>
@@ -2296,7 +2296,7 @@
           <p:cNvPr id="15" name="">
             <a:extLst xmlns:a="http://schemas.openxmlformats.org/drawingml/2006/main">
               <a:ext uri="{FF2B5EF4-FFF2-40B4-BE49-F238E27FC236}">
-                <a16:creationId xmlns:a16="http://schemas.microsoft.com/office/drawing/2014/main" id="{22868BD9-9A9A-4358-9DA8-3ADBD9BA5418}"/>
+                <a16:creationId xmlns:a16="http://schemas.microsoft.com/office/drawing/2014/main" id="{A481EE38-5BFC-4CBE-A9C3-7C5ED3433B6D}"/>
               </a:ext>
             </a:extLst>
           </p:cNvPr>
@@ -2325,7 +2325,7 @@
           <p:cNvPr id="16" name="">
             <a:extLst xmlns:a="http://schemas.openxmlformats.org/drawingml/2006/main">
               <a:ext uri="{FF2B5EF4-FFF2-40B4-BE49-F238E27FC236}">
-                <a16:creationId xmlns:a16="http://schemas.microsoft.com/office/drawing/2014/main" id="{25810F34-3158-4FED-BAF3-172975043EAD}"/>
+                <a16:creationId xmlns:a16="http://schemas.microsoft.com/office/drawing/2014/main" id="{711DAC5B-7451-45C4-BDBC-701268BA8DF5}"/>
               </a:ext>
             </a:extLst>
           </p:cNvPr>
@@ -2370,7 +2370,7 @@
           <p:cNvPr id="17" name="">
             <a:extLst xmlns:a="http://schemas.openxmlformats.org/drawingml/2006/main">
               <a:ext uri="{FF2B5EF4-FFF2-40B4-BE49-F238E27FC236}">
-                <a16:creationId xmlns:a16="http://schemas.microsoft.com/office/drawing/2014/main" id="{DFD2D506-FA38-46D1-BFB8-DB65E87AD126}"/>
+                <a16:creationId xmlns:a16="http://schemas.microsoft.com/office/drawing/2014/main" id="{FB26444B-9F48-489B-89DA-1FB5A6F87E30}"/>
               </a:ext>
             </a:extLst>
           </p:cNvPr>
@@ -2415,7 +2415,7 @@
           <p:cNvPr id="18" name="">
             <a:extLst xmlns:a="http://schemas.openxmlformats.org/drawingml/2006/main">
               <a:ext uri="{FF2B5EF4-FFF2-40B4-BE49-F238E27FC236}">
-                <a16:creationId xmlns:a16="http://schemas.microsoft.com/office/drawing/2014/main" id="{3CB36AA5-EC47-4E87-9F0D-AE5E6D975B5C}"/>
+                <a16:creationId xmlns:a16="http://schemas.microsoft.com/office/drawing/2014/main" id="{E04296FE-2D47-4516-9571-17FB7C3E95B4}"/>
               </a:ext>
             </a:extLst>
           </p:cNvPr>
@@ -2444,7 +2444,7 @@
           <p:cNvPr id="19" name="">
             <a:extLst xmlns:a="http://schemas.openxmlformats.org/drawingml/2006/main">
               <a:ext uri="{FF2B5EF4-FFF2-40B4-BE49-F238E27FC236}">
-                <a16:creationId xmlns:a16="http://schemas.microsoft.com/office/drawing/2014/main" id="{4FF222E2-1EFE-4CE2-9C98-EB724CD6F219}"/>
+                <a16:creationId xmlns:a16="http://schemas.microsoft.com/office/drawing/2014/main" id="{7FD09E00-573D-4BC2-BD9B-2BD3B5AFACC2}"/>
               </a:ext>
             </a:extLst>
           </p:cNvPr>
@@ -2489,7 +2489,7 @@
           <p:cNvPr id="20" name="">
             <a:extLst xmlns:a="http://schemas.openxmlformats.org/drawingml/2006/main">
               <a:ext uri="{FF2B5EF4-FFF2-40B4-BE49-F238E27FC236}">
-                <a16:creationId xmlns:a16="http://schemas.microsoft.com/office/drawing/2014/main" id="{A4B99804-2FF7-42D7-B4C2-C3E56BD7F372}"/>
+                <a16:creationId xmlns:a16="http://schemas.microsoft.com/office/drawing/2014/main" id="{A4F9B58F-4F44-4475-8F2B-8466401C506A}"/>
               </a:ext>
             </a:extLst>
           </p:cNvPr>
@@ -2534,7 +2534,7 @@
           <p:cNvPr id="21" name="">
             <a:extLst xmlns:a="http://schemas.openxmlformats.org/drawingml/2006/main">
               <a:ext uri="{FF2B5EF4-FFF2-40B4-BE49-F238E27FC236}">
-                <a16:creationId xmlns:a16="http://schemas.microsoft.com/office/drawing/2014/main" id="{2CAE2D8A-3939-4D7A-860E-B9B2CE9EFD71}"/>
+                <a16:creationId xmlns:a16="http://schemas.microsoft.com/office/drawing/2014/main" id="{567CB91A-B0E6-499C-95BE-486FABD977FE}"/>
               </a:ext>
             </a:extLst>
           </p:cNvPr>
@@ -2563,7 +2563,7 @@
           <p:cNvPr id="22" name="">
             <a:extLst xmlns:a="http://schemas.openxmlformats.org/drawingml/2006/main">
               <a:ext uri="{FF2B5EF4-FFF2-40B4-BE49-F238E27FC236}">
-                <a16:creationId xmlns:a16="http://schemas.microsoft.com/office/drawing/2014/main" id="{91C0B69C-B31A-4497-A499-07E7648D09F7}"/>
+                <a16:creationId xmlns:a16="http://schemas.microsoft.com/office/drawing/2014/main" id="{2CD6087F-8AF9-4535-A168-6A359F5A09DF}"/>
               </a:ext>
             </a:extLst>
           </p:cNvPr>
@@ -2608,7 +2608,7 @@
           <p:cNvPr id="23" name="">
             <a:extLst xmlns:a="http://schemas.openxmlformats.org/drawingml/2006/main">
               <a:ext uri="{FF2B5EF4-FFF2-40B4-BE49-F238E27FC236}">
-                <a16:creationId xmlns:a16="http://schemas.microsoft.com/office/drawing/2014/main" id="{ACF54E51-C77C-427C-ADE3-0EDF04108E52}"/>
+                <a16:creationId xmlns:a16="http://schemas.microsoft.com/office/drawing/2014/main" id="{01BC3E52-8CA6-45B6-B20A-7AE76E0F3C40}"/>
               </a:ext>
             </a:extLst>
           </p:cNvPr>
@@ -2653,7 +2653,7 @@
           <p:cNvPr id="24" name="">
             <a:extLst xmlns:a="http://schemas.openxmlformats.org/drawingml/2006/main">
               <a:ext uri="{FF2B5EF4-FFF2-40B4-BE49-F238E27FC236}">
-                <a16:creationId xmlns:a16="http://schemas.microsoft.com/office/drawing/2014/main" id="{F88DD5A1-EC64-4295-A9EC-C398179782E5}"/>
+                <a16:creationId xmlns:a16="http://schemas.microsoft.com/office/drawing/2014/main" id="{1E583112-B45A-48A5-A816-AB0A8BE8DB1D}"/>
               </a:ext>
             </a:extLst>
           </p:cNvPr>
@@ -2682,7 +2682,7 @@
           <p:cNvPr id="25" name="">
             <a:extLst xmlns:a="http://schemas.openxmlformats.org/drawingml/2006/main">
               <a:ext uri="{FF2B5EF4-FFF2-40B4-BE49-F238E27FC236}">
-                <a16:creationId xmlns:a16="http://schemas.microsoft.com/office/drawing/2014/main" id="{D581EA6E-D945-45F1-9BAF-C06299ABBDC2}"/>
+                <a16:creationId xmlns:a16="http://schemas.microsoft.com/office/drawing/2014/main" id="{36F8D0AF-8B5E-4301-97BB-65A744B4D903}"/>
               </a:ext>
             </a:extLst>
           </p:cNvPr>
@@ -2727,7 +2727,7 @@
           <p:cNvPr id="26" name="">
             <a:extLst xmlns:a="http://schemas.openxmlformats.org/drawingml/2006/main">
               <a:ext uri="{FF2B5EF4-FFF2-40B4-BE49-F238E27FC236}">
-                <a16:creationId xmlns:a16="http://schemas.microsoft.com/office/drawing/2014/main" id="{E1E553B7-BD7B-4B13-A665-FF237F0781C2}"/>
+                <a16:creationId xmlns:a16="http://schemas.microsoft.com/office/drawing/2014/main" id="{3F7E979D-5BEA-408F-84BD-45576C1A3DAE}"/>
               </a:ext>
             </a:extLst>
           </p:cNvPr>
@@ -2772,7 +2772,7 @@
           <p:cNvPr id="27" name="">
             <a:extLst xmlns:a="http://schemas.openxmlformats.org/drawingml/2006/main">
               <a:ext uri="{FF2B5EF4-FFF2-40B4-BE49-F238E27FC236}">
-                <a16:creationId xmlns:a16="http://schemas.microsoft.com/office/drawing/2014/main" id="{5073677E-2E33-4F70-ACDE-EDCB062A2985}"/>
+                <a16:creationId xmlns:a16="http://schemas.microsoft.com/office/drawing/2014/main" id="{F536D3EA-8DFA-498C-BF06-225DA58447D6}"/>
               </a:ext>
             </a:extLst>
           </p:cNvPr>
@@ -2801,7 +2801,7 @@
           <p:cNvPr id="28" name="">
             <a:extLst xmlns:a="http://schemas.openxmlformats.org/drawingml/2006/main">
               <a:ext uri="{FF2B5EF4-FFF2-40B4-BE49-F238E27FC236}">
-                <a16:creationId xmlns:a16="http://schemas.microsoft.com/office/drawing/2014/main" id="{69F0924E-8925-40F8-9669-EF7F6FBA2E63}"/>
+                <a16:creationId xmlns:a16="http://schemas.microsoft.com/office/drawing/2014/main" id="{BAE54EFC-C197-4E18-9B94-CD9189CF7A9C}"/>
               </a:ext>
             </a:extLst>
           </p:cNvPr>
@@ -2846,7 +2846,7 @@
           <p:cNvPr id="29" name="">
             <a:extLst xmlns:a="http://schemas.openxmlformats.org/drawingml/2006/main">
               <a:ext uri="{FF2B5EF4-FFF2-40B4-BE49-F238E27FC236}">
-                <a16:creationId xmlns:a16="http://schemas.microsoft.com/office/drawing/2014/main" id="{F991168B-0B71-467E-BF59-C7D230206842}"/>
+                <a16:creationId xmlns:a16="http://schemas.microsoft.com/office/drawing/2014/main" id="{1B2CDDEE-C803-45E3-8673-28B4F16C89F4}"/>
               </a:ext>
             </a:extLst>
           </p:cNvPr>
@@ -2891,7 +2891,7 @@
           <p:cNvPr id="30" name="">
             <a:extLst xmlns:a="http://schemas.openxmlformats.org/drawingml/2006/main">
               <a:ext uri="{FF2B5EF4-FFF2-40B4-BE49-F238E27FC236}">
-                <a16:creationId xmlns:a16="http://schemas.microsoft.com/office/drawing/2014/main" id="{E9AE5C8B-9D2B-45FE-B97A-093CD1AF77B2}"/>
+                <a16:creationId xmlns:a16="http://schemas.microsoft.com/office/drawing/2014/main" id="{9722D72F-A45E-41BB-8C9E-13D2629A1BC0}"/>
               </a:ext>
             </a:extLst>
           </p:cNvPr>
@@ -2920,7 +2920,7 @@
           <p:cNvPr id="31" name="">
             <a:extLst xmlns:a="http://schemas.openxmlformats.org/drawingml/2006/main">
               <a:ext uri="{FF2B5EF4-FFF2-40B4-BE49-F238E27FC236}">
-                <a16:creationId xmlns:a16="http://schemas.microsoft.com/office/drawing/2014/main" id="{EEE0A49C-798B-4E5A-9E2B-8FB2EEB500C4}"/>
+                <a16:creationId xmlns:a16="http://schemas.microsoft.com/office/drawing/2014/main" id="{0FBCCCE6-7DFD-40D6-9063-79E6961D1AD5}"/>
               </a:ext>
             </a:extLst>
           </p:cNvPr>
@@ -2965,7 +2965,7 @@
           <p:cNvPr id="32" name="">
             <a:extLst xmlns:a="http://schemas.openxmlformats.org/drawingml/2006/main">
               <a:ext uri="{FF2B5EF4-FFF2-40B4-BE49-F238E27FC236}">
-                <a16:creationId xmlns:a16="http://schemas.microsoft.com/office/drawing/2014/main" id="{7DB5C2D3-0CD4-45B3-B6C2-F519E6296896}"/>
+                <a16:creationId xmlns:a16="http://schemas.microsoft.com/office/drawing/2014/main" id="{B59A262D-5052-4702-BE25-94C2D52908D0}"/>
               </a:ext>
             </a:extLst>
           </p:cNvPr>
@@ -3010,7 +3010,7 @@
           <p:cNvPr id="33" name="footer">
             <a:extLst xmlns:a="http://schemas.openxmlformats.org/drawingml/2006/main">
               <a:ext uri="{FF2B5EF4-FFF2-40B4-BE49-F238E27FC236}">
-                <a16:creationId xmlns:a16="http://schemas.microsoft.com/office/drawing/2014/main" id="{388B54F9-D8CE-4E0F-AE5C-7758AE633FCC}"/>
+                <a16:creationId xmlns:a16="http://schemas.microsoft.com/office/drawing/2014/main" id="{EBB76EEE-EA27-480E-A5DB-2819684893F9}"/>
               </a:ext>
             </a:extLst>
           </p:cNvPr>
@@ -3053,7 +3053,7 @@
     </p:spTree>
     <p:extLst>
       <p:ext uri="{BB962C8B-B14F-4D97-AF65-F5344CB8AC3E}">
-        <p14:creationId xmlns:p14="http://schemas.microsoft.com/office/powerpoint/2010/main" val="783990750"/>
+        <p14:creationId xmlns:p14="http://schemas.microsoft.com/office/powerpoint/2010/main" val="316774557"/>
       </p:ext>
     </p:extLst>
   </p:cSld>
@@ -3077,7 +3077,7 @@
           <p:cNvPr id="1" name="slide-title">
             <a:extLst xmlns:a="http://schemas.openxmlformats.org/drawingml/2006/main">
               <a:ext uri="{FF2B5EF4-FFF2-40B4-BE49-F238E27FC236}">
-                <a16:creationId xmlns:a16="http://schemas.microsoft.com/office/drawing/2014/main" id="{00E262CC-71DE-4050-9207-0A5332CD951C}"/>
+                <a16:creationId xmlns:a16="http://schemas.microsoft.com/office/drawing/2014/main" id="{706DB941-C3FD-47BB-B009-4EC7C843FAE7}"/>
               </a:ext>
             </a:extLst>
           </p:cNvPr>
@@ -3122,7 +3122,7 @@
           <p:cNvPr id="2" name="">
             <a:extLst xmlns:a="http://schemas.openxmlformats.org/drawingml/2006/main">
               <a:ext uri="{FF2B5EF4-FFF2-40B4-BE49-F238E27FC236}">
-                <a16:creationId xmlns:a16="http://schemas.microsoft.com/office/drawing/2014/main" id="{C24D1342-F95F-47C8-8286-055D7E1BBEA9}"/>
+                <a16:creationId xmlns:a16="http://schemas.microsoft.com/office/drawing/2014/main" id="{FFA7BA7B-7BB0-4B6E-82FF-8C52E28E8B06}"/>
               </a:ext>
             </a:extLst>
           </p:cNvPr>
@@ -3155,7 +3155,7 @@
           <p:cNvPr id="3" name="">
             <a:extLst xmlns:a="http://schemas.openxmlformats.org/drawingml/2006/main">
               <a:ext uri="{FF2B5EF4-FFF2-40B4-BE49-F238E27FC236}">
-                <a16:creationId xmlns:a16="http://schemas.microsoft.com/office/drawing/2014/main" id="{6824FD18-E8F2-4DCF-8198-C4B102E30380}"/>
+                <a16:creationId xmlns:a16="http://schemas.microsoft.com/office/drawing/2014/main" id="{391941A1-CA11-4CC9-8940-F649AFCE4854}"/>
               </a:ext>
             </a:extLst>
           </p:cNvPr>
@@ -3200,7 +3200,7 @@
           <p:cNvPr id="4" name="">
             <a:extLst xmlns:a="http://schemas.openxmlformats.org/drawingml/2006/main">
               <a:ext uri="{FF2B5EF4-FFF2-40B4-BE49-F238E27FC236}">
-                <a16:creationId xmlns:a16="http://schemas.microsoft.com/office/drawing/2014/main" id="{5C48DAFF-D40A-4331-9FA0-BE2B49F920E6}"/>
+                <a16:creationId xmlns:a16="http://schemas.microsoft.com/office/drawing/2014/main" id="{06063009-5CC6-4CEB-9ECD-B4D96398F1D1}"/>
               </a:ext>
             </a:extLst>
           </p:cNvPr>
@@ -3245,7 +3245,7 @@
           <p:cNvPr id="5" name="">
             <a:extLst xmlns:a="http://schemas.openxmlformats.org/drawingml/2006/main">
               <a:ext uri="{FF2B5EF4-FFF2-40B4-BE49-F238E27FC236}">
-                <a16:creationId xmlns:a16="http://schemas.microsoft.com/office/drawing/2014/main" id="{403A9271-03D2-47C5-8045-F2563086B326}"/>
+                <a16:creationId xmlns:a16="http://schemas.microsoft.com/office/drawing/2014/main" id="{5590CEBA-7882-4DD7-A3D2-473E85BAF15F}"/>
               </a:ext>
             </a:extLst>
           </p:cNvPr>
@@ -3274,7 +3274,7 @@
           <p:cNvPr id="6" name="">
             <a:extLst xmlns:a="http://schemas.openxmlformats.org/drawingml/2006/main">
               <a:ext uri="{FF2B5EF4-FFF2-40B4-BE49-F238E27FC236}">
-                <a16:creationId xmlns:a16="http://schemas.microsoft.com/office/drawing/2014/main" id="{D703AAB9-7255-43C1-BF7C-1B072A2D9C20}"/>
+                <a16:creationId xmlns:a16="http://schemas.microsoft.com/office/drawing/2014/main" id="{5EB52210-A7BB-4A54-B91B-D729DC677C73}"/>
               </a:ext>
             </a:extLst>
           </p:cNvPr>
@@ -3319,7 +3319,7 @@
           <p:cNvPr id="7" name="">
             <a:extLst xmlns:a="http://schemas.openxmlformats.org/drawingml/2006/main">
               <a:ext uri="{FF2B5EF4-FFF2-40B4-BE49-F238E27FC236}">
-                <a16:creationId xmlns:a16="http://schemas.microsoft.com/office/drawing/2014/main" id="{605F1896-C8CA-445F-9B1B-BA402AD7ADD9}"/>
+                <a16:creationId xmlns:a16="http://schemas.microsoft.com/office/drawing/2014/main" id="{1E168A4D-A3A0-474C-9987-64D26ACA0E79}"/>
               </a:ext>
             </a:extLst>
           </p:cNvPr>
@@ -3364,7 +3364,7 @@
           <p:cNvPr id="8" name="">
             <a:extLst xmlns:a="http://schemas.openxmlformats.org/drawingml/2006/main">
               <a:ext uri="{FF2B5EF4-FFF2-40B4-BE49-F238E27FC236}">
-                <a16:creationId xmlns:a16="http://schemas.microsoft.com/office/drawing/2014/main" id="{E90C6F24-CE34-4EF8-9A9B-85925A99320D}"/>
+                <a16:creationId xmlns:a16="http://schemas.microsoft.com/office/drawing/2014/main" id="{FCD814D4-7352-4AED-8380-F20BD32FE16A}"/>
               </a:ext>
             </a:extLst>
           </p:cNvPr>
@@ -3409,7 +3409,7 @@
           <p:cNvPr id="9" name="">
             <a:extLst xmlns:a="http://schemas.openxmlformats.org/drawingml/2006/main">
               <a:ext uri="{FF2B5EF4-FFF2-40B4-BE49-F238E27FC236}">
-                <a16:creationId xmlns:a16="http://schemas.microsoft.com/office/drawing/2014/main" id="{2678780C-C39C-4D54-9DE9-6F2B854F727C}"/>
+                <a16:creationId xmlns:a16="http://schemas.microsoft.com/office/drawing/2014/main" id="{16BE358C-EC5F-469F-A670-2CFA29BC5777}"/>
               </a:ext>
             </a:extLst>
           </p:cNvPr>
@@ -3454,7 +3454,7 @@
           <p:cNvPr id="10" name="">
             <a:extLst xmlns:a="http://schemas.openxmlformats.org/drawingml/2006/main">
               <a:ext uri="{FF2B5EF4-FFF2-40B4-BE49-F238E27FC236}">
-                <a16:creationId xmlns:a16="http://schemas.microsoft.com/office/drawing/2014/main" id="{00836D59-9460-43F6-A204-43E3DD11AAAC}"/>
+                <a16:creationId xmlns:a16="http://schemas.microsoft.com/office/drawing/2014/main" id="{2F4C3C8C-728F-46E1-822D-8032302D0C52}"/>
               </a:ext>
             </a:extLst>
           </p:cNvPr>
@@ -3483,7 +3483,7 @@
           <p:cNvPr id="11" name="">
             <a:extLst xmlns:a="http://schemas.openxmlformats.org/drawingml/2006/main">
               <a:ext uri="{FF2B5EF4-FFF2-40B4-BE49-F238E27FC236}">
-                <a16:creationId xmlns:a16="http://schemas.microsoft.com/office/drawing/2014/main" id="{08765021-D0C0-43F6-AE5A-5AC735F9A410}"/>
+                <a16:creationId xmlns:a16="http://schemas.microsoft.com/office/drawing/2014/main" id="{793E696E-AC03-4E91-BF7C-A4C4E895202F}"/>
               </a:ext>
             </a:extLst>
           </p:cNvPr>
@@ -3528,7 +3528,7 @@
           <p:cNvPr id="12" name="">
             <a:extLst xmlns:a="http://schemas.openxmlformats.org/drawingml/2006/main">
               <a:ext uri="{FF2B5EF4-FFF2-40B4-BE49-F238E27FC236}">
-                <a16:creationId xmlns:a16="http://schemas.microsoft.com/office/drawing/2014/main" id="{C2EF9F1C-9E5E-47C1-B593-C3C5756F41DE}"/>
+                <a16:creationId xmlns:a16="http://schemas.microsoft.com/office/drawing/2014/main" id="{3B3DFDF1-E946-4BE8-8D95-362840DD3BF3}"/>
               </a:ext>
             </a:extLst>
           </p:cNvPr>
@@ -3573,7 +3573,7 @@
           <p:cNvPr id="13" name="">
             <a:extLst xmlns:a="http://schemas.openxmlformats.org/drawingml/2006/main">
               <a:ext uri="{FF2B5EF4-FFF2-40B4-BE49-F238E27FC236}">
-                <a16:creationId xmlns:a16="http://schemas.microsoft.com/office/drawing/2014/main" id="{021CCA4F-7120-4366-AC46-CEEDD9DBF5F6}"/>
+                <a16:creationId xmlns:a16="http://schemas.microsoft.com/office/drawing/2014/main" id="{7C53C8FA-A56B-4060-988B-CB9997061196}"/>
               </a:ext>
             </a:extLst>
           </p:cNvPr>
@@ -3618,7 +3618,7 @@
           <p:cNvPr id="14" name="">
             <a:extLst xmlns:a="http://schemas.openxmlformats.org/drawingml/2006/main">
               <a:ext uri="{FF2B5EF4-FFF2-40B4-BE49-F238E27FC236}">
-                <a16:creationId xmlns:a16="http://schemas.microsoft.com/office/drawing/2014/main" id="{6A9D2229-51D1-4444-A66D-B0E3FD1ED839}"/>
+                <a16:creationId xmlns:a16="http://schemas.microsoft.com/office/drawing/2014/main" id="{0350EBF8-99BD-479C-AC16-E0F162F665A2}"/>
               </a:ext>
             </a:extLst>
           </p:cNvPr>
@@ -3663,7 +3663,7 @@
           <p:cNvPr id="15" name="">
             <a:extLst xmlns:a="http://schemas.openxmlformats.org/drawingml/2006/main">
               <a:ext uri="{FF2B5EF4-FFF2-40B4-BE49-F238E27FC236}">
-                <a16:creationId xmlns:a16="http://schemas.microsoft.com/office/drawing/2014/main" id="{0FF6ADC5-6BA0-4718-AE9D-98A9A4468F07}"/>
+                <a16:creationId xmlns:a16="http://schemas.microsoft.com/office/drawing/2014/main" id="{1217899C-6F09-4833-90C3-C89B9FF3C831}"/>
               </a:ext>
             </a:extLst>
           </p:cNvPr>
@@ -3692,7 +3692,7 @@
           <p:cNvPr id="16" name="">
             <a:extLst xmlns:a="http://schemas.openxmlformats.org/drawingml/2006/main">
               <a:ext uri="{FF2B5EF4-FFF2-40B4-BE49-F238E27FC236}">
-                <a16:creationId xmlns:a16="http://schemas.microsoft.com/office/drawing/2014/main" id="{87A787C0-D383-4F95-BF6D-DAE89FD40A89}"/>
+                <a16:creationId xmlns:a16="http://schemas.microsoft.com/office/drawing/2014/main" id="{B2F89F58-8FC1-496A-BD76-BB22D15EC9C7}"/>
               </a:ext>
             </a:extLst>
           </p:cNvPr>
@@ -3737,7 +3737,7 @@
           <p:cNvPr id="17" name="">
             <a:extLst xmlns:a="http://schemas.openxmlformats.org/drawingml/2006/main">
               <a:ext uri="{FF2B5EF4-FFF2-40B4-BE49-F238E27FC236}">
-                <a16:creationId xmlns:a16="http://schemas.microsoft.com/office/drawing/2014/main" id="{27FBA951-C66E-4B6C-B4CA-8621D4FEE3E3}"/>
+                <a16:creationId xmlns:a16="http://schemas.microsoft.com/office/drawing/2014/main" id="{C3DE2BC7-101D-4A9D-A611-D69FFB8B2687}"/>
               </a:ext>
             </a:extLst>
           </p:cNvPr>
@@ -3782,7 +3782,7 @@
           <p:cNvPr id="18" name="">
             <a:extLst xmlns:a="http://schemas.openxmlformats.org/drawingml/2006/main">
               <a:ext uri="{FF2B5EF4-FFF2-40B4-BE49-F238E27FC236}">
-                <a16:creationId xmlns:a16="http://schemas.microsoft.com/office/drawing/2014/main" id="{9BF3174D-CDA3-4C1F-A41C-9FFA8516D687}"/>
+                <a16:creationId xmlns:a16="http://schemas.microsoft.com/office/drawing/2014/main" id="{6BAB42A5-327F-4B7E-87B3-488B43DD2F70}"/>
               </a:ext>
             </a:extLst>
           </p:cNvPr>
@@ -3827,7 +3827,7 @@
           <p:cNvPr id="19" name="">
             <a:extLst xmlns:a="http://schemas.openxmlformats.org/drawingml/2006/main">
               <a:ext uri="{FF2B5EF4-FFF2-40B4-BE49-F238E27FC236}">
-                <a16:creationId xmlns:a16="http://schemas.microsoft.com/office/drawing/2014/main" id="{B0F982BA-1768-4D60-8BC9-2F8FC06F602C}"/>
+                <a16:creationId xmlns:a16="http://schemas.microsoft.com/office/drawing/2014/main" id="{B0273D98-192B-4F43-9D2D-F0E31F2542DC}"/>
               </a:ext>
             </a:extLst>
           </p:cNvPr>
@@ -3872,7 +3872,7 @@
           <p:cNvPr id="20" name="">
             <a:extLst xmlns:a="http://schemas.openxmlformats.org/drawingml/2006/main">
               <a:ext uri="{FF2B5EF4-FFF2-40B4-BE49-F238E27FC236}">
-                <a16:creationId xmlns:a16="http://schemas.microsoft.com/office/drawing/2014/main" id="{DB31A0C0-13CD-4865-A0CE-EBC962D57645}"/>
+                <a16:creationId xmlns:a16="http://schemas.microsoft.com/office/drawing/2014/main" id="{AB00643D-63ED-442D-9D11-5B3133D80530}"/>
               </a:ext>
             </a:extLst>
           </p:cNvPr>
@@ -3901,7 +3901,7 @@
           <p:cNvPr id="21" name="">
             <a:extLst xmlns:a="http://schemas.openxmlformats.org/drawingml/2006/main">
               <a:ext uri="{FF2B5EF4-FFF2-40B4-BE49-F238E27FC236}">
-                <a16:creationId xmlns:a16="http://schemas.microsoft.com/office/drawing/2014/main" id="{FD6EF700-51F3-4F1D-8783-06EAC96A0EC8}"/>
+                <a16:creationId xmlns:a16="http://schemas.microsoft.com/office/drawing/2014/main" id="{D58E2A35-2A4A-4550-B365-E59EC1527731}"/>
               </a:ext>
             </a:extLst>
           </p:cNvPr>
@@ -3946,7 +3946,7 @@
           <p:cNvPr id="22" name="">
             <a:extLst xmlns:a="http://schemas.openxmlformats.org/drawingml/2006/main">
               <a:ext uri="{FF2B5EF4-FFF2-40B4-BE49-F238E27FC236}">
-                <a16:creationId xmlns:a16="http://schemas.microsoft.com/office/drawing/2014/main" id="{9F847C0F-2047-4D8B-BD1B-840E48B8B64E}"/>
+                <a16:creationId xmlns:a16="http://schemas.microsoft.com/office/drawing/2014/main" id="{8CDB5179-E47D-4AD4-9234-C1B0AB9497E2}"/>
               </a:ext>
             </a:extLst>
           </p:cNvPr>
@@ -3991,7 +3991,7 @@
           <p:cNvPr id="23" name="">
             <a:extLst xmlns:a="http://schemas.openxmlformats.org/drawingml/2006/main">
               <a:ext uri="{FF2B5EF4-FFF2-40B4-BE49-F238E27FC236}">
-                <a16:creationId xmlns:a16="http://schemas.microsoft.com/office/drawing/2014/main" id="{1E1893D3-8A74-4C40-A327-85403D7B4966}"/>
+                <a16:creationId xmlns:a16="http://schemas.microsoft.com/office/drawing/2014/main" id="{C216D813-3E55-4450-98BE-CD7F6909243C}"/>
               </a:ext>
             </a:extLst>
           </p:cNvPr>
@@ -4036,7 +4036,7 @@
           <p:cNvPr id="24" name="">
             <a:extLst xmlns:a="http://schemas.openxmlformats.org/drawingml/2006/main">
               <a:ext uri="{FF2B5EF4-FFF2-40B4-BE49-F238E27FC236}">
-                <a16:creationId xmlns:a16="http://schemas.microsoft.com/office/drawing/2014/main" id="{468C0DCD-D7A9-4881-8561-102467704693}"/>
+                <a16:creationId xmlns:a16="http://schemas.microsoft.com/office/drawing/2014/main" id="{45562AAF-A894-4A97-9433-B7B2367465BB}"/>
               </a:ext>
             </a:extLst>
           </p:cNvPr>
@@ -4081,7 +4081,7 @@
           <p:cNvPr id="25" name="">
             <a:extLst xmlns:a="http://schemas.openxmlformats.org/drawingml/2006/main">
               <a:ext uri="{FF2B5EF4-FFF2-40B4-BE49-F238E27FC236}">
-                <a16:creationId xmlns:a16="http://schemas.microsoft.com/office/drawing/2014/main" id="{03841505-AD1C-448F-A2EF-4F3FBC5C0451}"/>
+                <a16:creationId xmlns:a16="http://schemas.microsoft.com/office/drawing/2014/main" id="{F294E2A9-ADC2-408F-90D1-C68D88EE7F0D}"/>
               </a:ext>
             </a:extLst>
           </p:cNvPr>
@@ -4110,7 +4110,7 @@
           <p:cNvPr id="26" name="">
             <a:extLst xmlns:a="http://schemas.openxmlformats.org/drawingml/2006/main">
               <a:ext uri="{FF2B5EF4-FFF2-40B4-BE49-F238E27FC236}">
-                <a16:creationId xmlns:a16="http://schemas.microsoft.com/office/drawing/2014/main" id="{77AD30E4-C433-4509-9049-6487C67F44FE}"/>
+                <a16:creationId xmlns:a16="http://schemas.microsoft.com/office/drawing/2014/main" id="{FE85D230-EF0C-425C-BB14-B2BED68BEAA4}"/>
               </a:ext>
             </a:extLst>
           </p:cNvPr>
@@ -4155,7 +4155,7 @@
           <p:cNvPr id="27" name="">
             <a:extLst xmlns:a="http://schemas.openxmlformats.org/drawingml/2006/main">
               <a:ext uri="{FF2B5EF4-FFF2-40B4-BE49-F238E27FC236}">
-                <a16:creationId xmlns:a16="http://schemas.microsoft.com/office/drawing/2014/main" id="{1F9974B3-F9C5-4815-8417-35DD910561C4}"/>
+                <a16:creationId xmlns:a16="http://schemas.microsoft.com/office/drawing/2014/main" id="{59DD3C11-E92B-4CA2-AF5B-283C24AB8AD8}"/>
               </a:ext>
             </a:extLst>
           </p:cNvPr>
@@ -4200,7 +4200,7 @@
           <p:cNvPr id="28" name="">
             <a:extLst xmlns:a="http://schemas.openxmlformats.org/drawingml/2006/main">
               <a:ext uri="{FF2B5EF4-FFF2-40B4-BE49-F238E27FC236}">
-                <a16:creationId xmlns:a16="http://schemas.microsoft.com/office/drawing/2014/main" id="{0264B84B-F98B-44D0-A1CC-FCD2E6F98C0B}"/>
+                <a16:creationId xmlns:a16="http://schemas.microsoft.com/office/drawing/2014/main" id="{698B5D2D-959E-4D47-84B5-B1E27DFAC2D6}"/>
               </a:ext>
             </a:extLst>
           </p:cNvPr>
@@ -4245,7 +4245,7 @@
           <p:cNvPr id="29" name="">
             <a:extLst xmlns:a="http://schemas.openxmlformats.org/drawingml/2006/main">
               <a:ext uri="{FF2B5EF4-FFF2-40B4-BE49-F238E27FC236}">
-                <a16:creationId xmlns:a16="http://schemas.microsoft.com/office/drawing/2014/main" id="{28A1D97B-F2FA-405F-86A5-57F4360DA169}"/>
+                <a16:creationId xmlns:a16="http://schemas.microsoft.com/office/drawing/2014/main" id="{485125E1-7CA4-4B8E-A845-55EDB69878C9}"/>
               </a:ext>
             </a:extLst>
           </p:cNvPr>
@@ -4290,7 +4290,7 @@
           <p:cNvPr id="30" name="footer">
             <a:extLst xmlns:a="http://schemas.openxmlformats.org/drawingml/2006/main">
               <a:ext uri="{FF2B5EF4-FFF2-40B4-BE49-F238E27FC236}">
-                <a16:creationId xmlns:a16="http://schemas.microsoft.com/office/drawing/2014/main" id="{79966619-3C96-4935-A302-C865E59A9D26}"/>
+                <a16:creationId xmlns:a16="http://schemas.microsoft.com/office/drawing/2014/main" id="{B51ABA64-B6AC-43B6-9255-96092BBAB2F5}"/>
               </a:ext>
             </a:extLst>
           </p:cNvPr>
@@ -4333,7 +4333,7 @@
     </p:spTree>
     <p:extLst>
       <p:ext uri="{BB962C8B-B14F-4D97-AF65-F5344CB8AC3E}">
-        <p14:creationId xmlns:p14="http://schemas.microsoft.com/office/powerpoint/2010/main" val="129983269"/>
+        <p14:creationId xmlns:p14="http://schemas.microsoft.com/office/powerpoint/2010/main" val="933927838"/>
       </p:ext>
     </p:extLst>
   </p:cSld>
@@ -4357,7 +4357,7 @@
           <p:cNvPr id="1" name="slide-title">
             <a:extLst xmlns:a="http://schemas.openxmlformats.org/drawingml/2006/main">
               <a:ext uri="{FF2B5EF4-FFF2-40B4-BE49-F238E27FC236}">
-                <a16:creationId xmlns:a16="http://schemas.microsoft.com/office/drawing/2014/main" id="{FC97E1D8-063F-4CBA-8785-8EFDC0EB388B}"/>
+                <a16:creationId xmlns:a16="http://schemas.microsoft.com/office/drawing/2014/main" id="{A3E94510-ACF5-42EC-B348-E6748C63A33B}"/>
               </a:ext>
             </a:extLst>
           </p:cNvPr>
@@ -4406,10 +4406,10 @@
           <p:nvPr/>
         </p:nvPicPr>
         <p:blipFill>
-          <a:blip xmlns:r="http://schemas.openxmlformats.org/officeDocument/2006/relationships" xmlns:a="http://schemas.openxmlformats.org/drawingml/2006/main" r:embed="R66175af6bf87492b">
+          <a:blip xmlns:r="http://schemas.openxmlformats.org/officeDocument/2006/relationships" xmlns:a="http://schemas.openxmlformats.org/drawingml/2006/main" r:embed="R9e0b626e54c047af">
             <a:extLst>
               <a:ext uri="{96DAC541-7B7A-43D3-8B79-37D633B846F1}">
-                <asvg:svgBlip xmlns:asvg="http://schemas.microsoft.com/office/drawing/2016/SVG/main" r:embed="R967762e80e4e494b"/>
+                <asvg:svgBlip xmlns:asvg="http://schemas.microsoft.com/office/drawing/2016/SVG/main" r:embed="Rcab80f83ec294bf3"/>
               </a:ext>
             </a:extLst>
           </a:blip>
@@ -4428,7 +4428,7 @@
     </p:spTree>
     <p:extLst>
       <p:ext uri="{BB962C8B-B14F-4D97-AF65-F5344CB8AC3E}">
-        <p14:creationId xmlns:p14="http://schemas.microsoft.com/office/powerpoint/2010/main" val="850096438"/>
+        <p14:creationId xmlns:p14="http://schemas.microsoft.com/office/powerpoint/2010/main" val="2116589237"/>
       </p:ext>
     </p:extLst>
   </p:cSld>
@@ -4452,7 +4452,7 @@
           <p:cNvPr id="1" name="slide-title">
             <a:extLst xmlns:a="http://schemas.openxmlformats.org/drawingml/2006/main">
               <a:ext uri="{FF2B5EF4-FFF2-40B4-BE49-F238E27FC236}">
-                <a16:creationId xmlns:a16="http://schemas.microsoft.com/office/drawing/2014/main" id="{BC0CD928-1DE9-48D7-ACFB-29B5392BFF0F}"/>
+                <a16:creationId xmlns:a16="http://schemas.microsoft.com/office/drawing/2014/main" id="{B7BE811A-2DDC-43AC-AA66-E33F3A08EC7B}"/>
               </a:ext>
             </a:extLst>
           </p:cNvPr>
@@ -4497,7 +4497,7 @@
           <p:cNvPr id="2" name="">
             <a:extLst xmlns:a="http://schemas.openxmlformats.org/drawingml/2006/main">
               <a:ext uri="{FF2B5EF4-FFF2-40B4-BE49-F238E27FC236}">
-                <a16:creationId xmlns:a16="http://schemas.microsoft.com/office/drawing/2014/main" id="{C1536A2E-B4A5-4E5D-8763-0700754A6692}"/>
+                <a16:creationId xmlns:a16="http://schemas.microsoft.com/office/drawing/2014/main" id="{199298ED-B7CD-4ACF-8223-52FDBE4BE467}"/>
               </a:ext>
             </a:extLst>
           </p:cNvPr>
@@ -4530,7 +4530,7 @@
           <p:cNvPr id="3" name="">
             <a:extLst xmlns:a="http://schemas.openxmlformats.org/drawingml/2006/main">
               <a:ext uri="{FF2B5EF4-FFF2-40B4-BE49-F238E27FC236}">
-                <a16:creationId xmlns:a16="http://schemas.microsoft.com/office/drawing/2014/main" id="{A0C25C29-4614-4A11-8BA6-E37E68BE20D7}"/>
+                <a16:creationId xmlns:a16="http://schemas.microsoft.com/office/drawing/2014/main" id="{D8267B94-C6B3-41BE-B6A9-D912AB9E5691}"/>
               </a:ext>
             </a:extLst>
           </p:cNvPr>
@@ -4575,7 +4575,7 @@
           <p:cNvPr id="4" name="">
             <a:extLst xmlns:a="http://schemas.openxmlformats.org/drawingml/2006/main">
               <a:ext uri="{FF2B5EF4-FFF2-40B4-BE49-F238E27FC236}">
-                <a16:creationId xmlns:a16="http://schemas.microsoft.com/office/drawing/2014/main" id="{AE68213B-BC03-4DE6-9A5F-D382C1AAB200}"/>
+                <a16:creationId xmlns:a16="http://schemas.microsoft.com/office/drawing/2014/main" id="{97723E5B-6B51-40C2-B279-CC549357A6F7}"/>
               </a:ext>
             </a:extLst>
           </p:cNvPr>
@@ -4620,7 +4620,7 @@
           <p:cNvPr id="5" name="">
             <a:extLst xmlns:a="http://schemas.openxmlformats.org/drawingml/2006/main">
               <a:ext uri="{FF2B5EF4-FFF2-40B4-BE49-F238E27FC236}">
-                <a16:creationId xmlns:a16="http://schemas.microsoft.com/office/drawing/2014/main" id="{235A434B-83DD-4797-9C97-256C0CA55546}"/>
+                <a16:creationId xmlns:a16="http://schemas.microsoft.com/office/drawing/2014/main" id="{ECFF37B3-BB35-4E0D-BCB0-5389CEE9E5FF}"/>
               </a:ext>
             </a:extLst>
           </p:cNvPr>
@@ -4665,7 +4665,7 @@
           <p:cNvPr id="6" name="">
             <a:extLst xmlns:a="http://schemas.openxmlformats.org/drawingml/2006/main">
               <a:ext uri="{FF2B5EF4-FFF2-40B4-BE49-F238E27FC236}">
-                <a16:creationId xmlns:a16="http://schemas.microsoft.com/office/drawing/2014/main" id="{6A1C6484-AC7A-4323-845F-E981F5715322}"/>
+                <a16:creationId xmlns:a16="http://schemas.microsoft.com/office/drawing/2014/main" id="{D17EC98D-FC88-4723-A890-A9C976012A3F}"/>
               </a:ext>
             </a:extLst>
           </p:cNvPr>
@@ -4692,7 +4692,7 @@
           <p:cNvPr id="7" name="">
             <a:extLst xmlns:a="http://schemas.openxmlformats.org/drawingml/2006/main">
               <a:ext uri="{FF2B5EF4-FFF2-40B4-BE49-F238E27FC236}">
-                <a16:creationId xmlns:a16="http://schemas.microsoft.com/office/drawing/2014/main" id="{9AF50215-C80B-4CC6-A260-C1E673732BF6}"/>
+                <a16:creationId xmlns:a16="http://schemas.microsoft.com/office/drawing/2014/main" id="{FA69BF0C-AB1B-40CD-927B-EBC23803010A}"/>
               </a:ext>
             </a:extLst>
           </p:cNvPr>
@@ -4737,7 +4737,7 @@
           <p:cNvPr id="8" name="">
             <a:extLst xmlns:a="http://schemas.openxmlformats.org/drawingml/2006/main">
               <a:ext uri="{FF2B5EF4-FFF2-40B4-BE49-F238E27FC236}">
-                <a16:creationId xmlns:a16="http://schemas.microsoft.com/office/drawing/2014/main" id="{4B186CEA-746D-4C05-8651-E620CE62F129}"/>
+                <a16:creationId xmlns:a16="http://schemas.microsoft.com/office/drawing/2014/main" id="{03DA5CF2-F17B-4C5F-AE0D-A36878363BFB}"/>
               </a:ext>
             </a:extLst>
           </p:cNvPr>
@@ -4764,7 +4764,7 @@
           <p:cNvPr id="9" name="">
             <a:extLst xmlns:a="http://schemas.openxmlformats.org/drawingml/2006/main">
               <a:ext uri="{FF2B5EF4-FFF2-40B4-BE49-F238E27FC236}">
-                <a16:creationId xmlns:a16="http://schemas.microsoft.com/office/drawing/2014/main" id="{93F37D5B-038A-4468-889F-36B4B7C425EE}"/>
+                <a16:creationId xmlns:a16="http://schemas.microsoft.com/office/drawing/2014/main" id="{CF3FE86A-F5A1-4A94-A4EB-36C69D61F4E9}"/>
               </a:ext>
             </a:extLst>
           </p:cNvPr>
@@ -4809,7 +4809,7 @@
           <p:cNvPr id="10" name="">
             <a:extLst xmlns:a="http://schemas.openxmlformats.org/drawingml/2006/main">
               <a:ext uri="{FF2B5EF4-FFF2-40B4-BE49-F238E27FC236}">
-                <a16:creationId xmlns:a16="http://schemas.microsoft.com/office/drawing/2014/main" id="{EB2A5664-F9C6-436D-981E-6C575F7C2D55}"/>
+                <a16:creationId xmlns:a16="http://schemas.microsoft.com/office/drawing/2014/main" id="{441816FB-145F-4297-8A4C-7E4B669C3104}"/>
               </a:ext>
             </a:extLst>
           </p:cNvPr>
@@ -4836,7 +4836,7 @@
           <p:cNvPr id="11" name="">
             <a:extLst xmlns:a="http://schemas.openxmlformats.org/drawingml/2006/main">
               <a:ext uri="{FF2B5EF4-FFF2-40B4-BE49-F238E27FC236}">
-                <a16:creationId xmlns:a16="http://schemas.microsoft.com/office/drawing/2014/main" id="{89DDA2AD-C8FD-476C-AC7E-B0D2F1717C95}"/>
+                <a16:creationId xmlns:a16="http://schemas.microsoft.com/office/drawing/2014/main" id="{74ECE92A-1849-4FB5-BC85-C73A3040968A}"/>
               </a:ext>
             </a:extLst>
           </p:cNvPr>
@@ -4881,7 +4881,7 @@
           <p:cNvPr id="12" name="">
             <a:extLst xmlns:a="http://schemas.openxmlformats.org/drawingml/2006/main">
               <a:ext uri="{FF2B5EF4-FFF2-40B4-BE49-F238E27FC236}">
-                <a16:creationId xmlns:a16="http://schemas.microsoft.com/office/drawing/2014/main" id="{BB55A444-67E1-4981-A107-A54F16B943B6}"/>
+                <a16:creationId xmlns:a16="http://schemas.microsoft.com/office/drawing/2014/main" id="{2B00D33C-52B8-4309-86FB-72D056AD238F}"/>
               </a:ext>
             </a:extLst>
           </p:cNvPr>
@@ -4908,7 +4908,7 @@
           <p:cNvPr id="13" name="">
             <a:extLst xmlns:a="http://schemas.openxmlformats.org/drawingml/2006/main">
               <a:ext uri="{FF2B5EF4-FFF2-40B4-BE49-F238E27FC236}">
-                <a16:creationId xmlns:a16="http://schemas.microsoft.com/office/drawing/2014/main" id="{35709BC8-D924-4B7E-AAB0-3BD73B744E2C}"/>
+                <a16:creationId xmlns:a16="http://schemas.microsoft.com/office/drawing/2014/main" id="{7138A22D-21B2-4A54-B670-14D038119584}"/>
               </a:ext>
             </a:extLst>
           </p:cNvPr>
@@ -4953,7 +4953,7 @@
           <p:cNvPr id="14" name="">
             <a:extLst xmlns:a="http://schemas.openxmlformats.org/drawingml/2006/main">
               <a:ext uri="{FF2B5EF4-FFF2-40B4-BE49-F238E27FC236}">
-                <a16:creationId xmlns:a16="http://schemas.microsoft.com/office/drawing/2014/main" id="{204234ED-4228-4C2C-BFA5-FD85A235D3D0}"/>
+                <a16:creationId xmlns:a16="http://schemas.microsoft.com/office/drawing/2014/main" id="{73871F32-5FE6-4501-A724-3DC88C750093}"/>
               </a:ext>
             </a:extLst>
           </p:cNvPr>
@@ -4980,7 +4980,7 @@
           <p:cNvPr id="15" name="">
             <a:extLst xmlns:a="http://schemas.openxmlformats.org/drawingml/2006/main">
               <a:ext uri="{FF2B5EF4-FFF2-40B4-BE49-F238E27FC236}">
-                <a16:creationId xmlns:a16="http://schemas.microsoft.com/office/drawing/2014/main" id="{C1E0258C-6D97-47B8-9A59-9B4A5E7FB377}"/>
+                <a16:creationId xmlns:a16="http://schemas.microsoft.com/office/drawing/2014/main" id="{958D827D-1486-432B-AA56-71AAB6D71EE2}"/>
               </a:ext>
             </a:extLst>
           </p:cNvPr>
@@ -5025,7 +5025,7 @@
           <p:cNvPr id="16" name="">
             <a:extLst xmlns:a="http://schemas.openxmlformats.org/drawingml/2006/main">
               <a:ext uri="{FF2B5EF4-FFF2-40B4-BE49-F238E27FC236}">
-                <a16:creationId xmlns:a16="http://schemas.microsoft.com/office/drawing/2014/main" id="{C0BD2362-D807-4C36-B8CC-CB0D3DF11D1F}"/>
+                <a16:creationId xmlns:a16="http://schemas.microsoft.com/office/drawing/2014/main" id="{AC1D51DF-3717-4B65-A97D-69DF5AAD1EB8}"/>
               </a:ext>
             </a:extLst>
           </p:cNvPr>
@@ -5052,7 +5052,7 @@
           <p:cNvPr id="17" name="">
             <a:extLst xmlns:a="http://schemas.openxmlformats.org/drawingml/2006/main">
               <a:ext uri="{FF2B5EF4-FFF2-40B4-BE49-F238E27FC236}">
-                <a16:creationId xmlns:a16="http://schemas.microsoft.com/office/drawing/2014/main" id="{ED8B01BC-A5A4-4BAE-9391-462C75F583A4}"/>
+                <a16:creationId xmlns:a16="http://schemas.microsoft.com/office/drawing/2014/main" id="{08FC981C-9C13-4ADF-8CD2-CAFA8DD1B680}"/>
               </a:ext>
             </a:extLst>
           </p:cNvPr>
@@ -5097,7 +5097,7 @@
           <p:cNvPr id="18" name="">
             <a:extLst xmlns:a="http://schemas.openxmlformats.org/drawingml/2006/main">
               <a:ext uri="{FF2B5EF4-FFF2-40B4-BE49-F238E27FC236}">
-                <a16:creationId xmlns:a16="http://schemas.microsoft.com/office/drawing/2014/main" id="{35A5BEBC-D8ED-48DB-B380-F2BE51791768}"/>
+                <a16:creationId xmlns:a16="http://schemas.microsoft.com/office/drawing/2014/main" id="{DDCFF24C-7136-4378-BC70-FDCA11178112}"/>
               </a:ext>
             </a:extLst>
           </p:cNvPr>
@@ -5124,7 +5124,7 @@
           <p:cNvPr id="19" name="">
             <a:extLst xmlns:a="http://schemas.openxmlformats.org/drawingml/2006/main">
               <a:ext uri="{FF2B5EF4-FFF2-40B4-BE49-F238E27FC236}">
-                <a16:creationId xmlns:a16="http://schemas.microsoft.com/office/drawing/2014/main" id="{B36B88FF-E811-40D6-AE00-758E4BA800A8}"/>
+                <a16:creationId xmlns:a16="http://schemas.microsoft.com/office/drawing/2014/main" id="{2B59A832-1630-4C59-A5C9-5981DAB35583}"/>
               </a:ext>
             </a:extLst>
           </p:cNvPr>
@@ -5169,7 +5169,7 @@
           <p:cNvPr id="20" name="">
             <a:extLst xmlns:a="http://schemas.openxmlformats.org/drawingml/2006/main">
               <a:ext uri="{FF2B5EF4-FFF2-40B4-BE49-F238E27FC236}">
-                <a16:creationId xmlns:a16="http://schemas.microsoft.com/office/drawing/2014/main" id="{DEB5A555-2122-4253-ABC6-554986725FBD}"/>
+                <a16:creationId xmlns:a16="http://schemas.microsoft.com/office/drawing/2014/main" id="{E5A888D1-8B0C-4EE7-A9F6-248683C8C4A1}"/>
               </a:ext>
             </a:extLst>
           </p:cNvPr>
@@ -5196,7 +5196,7 @@
           <p:cNvPr id="21" name="">
             <a:extLst xmlns:a="http://schemas.openxmlformats.org/drawingml/2006/main">
               <a:ext uri="{FF2B5EF4-FFF2-40B4-BE49-F238E27FC236}">
-                <a16:creationId xmlns:a16="http://schemas.microsoft.com/office/drawing/2014/main" id="{FDAC7B5E-B5E9-4749-BD1F-3AFEC4AD9075}"/>
+                <a16:creationId xmlns:a16="http://schemas.microsoft.com/office/drawing/2014/main" id="{F9F33F41-56CD-4475-AC50-0F32344FBF62}"/>
               </a:ext>
             </a:extLst>
           </p:cNvPr>
@@ -5241,7 +5241,7 @@
           <p:cNvPr id="22" name="">
             <a:extLst xmlns:a="http://schemas.openxmlformats.org/drawingml/2006/main">
               <a:ext uri="{FF2B5EF4-FFF2-40B4-BE49-F238E27FC236}">
-                <a16:creationId xmlns:a16="http://schemas.microsoft.com/office/drawing/2014/main" id="{0696C65C-23C1-4C7C-BE50-6251AA2697C1}"/>
+                <a16:creationId xmlns:a16="http://schemas.microsoft.com/office/drawing/2014/main" id="{761C8401-A09C-4746-95BF-DC0A3743708F}"/>
               </a:ext>
             </a:extLst>
           </p:cNvPr>
@@ -5268,7 +5268,7 @@
           <p:cNvPr id="23" name="">
             <a:extLst xmlns:a="http://schemas.openxmlformats.org/drawingml/2006/main">
               <a:ext uri="{FF2B5EF4-FFF2-40B4-BE49-F238E27FC236}">
-                <a16:creationId xmlns:a16="http://schemas.microsoft.com/office/drawing/2014/main" id="{9F06C138-9B3C-4754-8CBA-D8D664391BC5}"/>
+                <a16:creationId xmlns:a16="http://schemas.microsoft.com/office/drawing/2014/main" id="{7991CB90-4F22-4A10-9E78-2F3C975A21AB}"/>
               </a:ext>
             </a:extLst>
           </p:cNvPr>
@@ -5313,7 +5313,7 @@
           <p:cNvPr id="24" name="">
             <a:extLst xmlns:a="http://schemas.openxmlformats.org/drawingml/2006/main">
               <a:ext uri="{FF2B5EF4-FFF2-40B4-BE49-F238E27FC236}">
-                <a16:creationId xmlns:a16="http://schemas.microsoft.com/office/drawing/2014/main" id="{25F255D7-B524-457B-B59B-0942349F025D}"/>
+                <a16:creationId xmlns:a16="http://schemas.microsoft.com/office/drawing/2014/main" id="{68EA00B2-82CC-4B47-9B2B-6DF10465823B}"/>
               </a:ext>
             </a:extLst>
           </p:cNvPr>
@@ -5340,7 +5340,7 @@
           <p:cNvPr id="25" name="">
             <a:extLst xmlns:a="http://schemas.openxmlformats.org/drawingml/2006/main">
               <a:ext uri="{FF2B5EF4-FFF2-40B4-BE49-F238E27FC236}">
-                <a16:creationId xmlns:a16="http://schemas.microsoft.com/office/drawing/2014/main" id="{F5AF21EC-91F0-4BC4-AF80-C504D7DB5354}"/>
+                <a16:creationId xmlns:a16="http://schemas.microsoft.com/office/drawing/2014/main" id="{C193C867-14BE-4C0A-A9E0-F3B82503FE8C}"/>
               </a:ext>
             </a:extLst>
           </p:cNvPr>
@@ -5385,7 +5385,7 @@
           <p:cNvPr id="26" name="">
             <a:extLst xmlns:a="http://schemas.openxmlformats.org/drawingml/2006/main">
               <a:ext uri="{FF2B5EF4-FFF2-40B4-BE49-F238E27FC236}">
-                <a16:creationId xmlns:a16="http://schemas.microsoft.com/office/drawing/2014/main" id="{FC45427B-D2DE-467B-8D15-ED7F29F55122}"/>
+                <a16:creationId xmlns:a16="http://schemas.microsoft.com/office/drawing/2014/main" id="{2E2AFDA7-D13B-4FDC-92C3-D591BA450773}"/>
               </a:ext>
             </a:extLst>
           </p:cNvPr>
@@ -5412,7 +5412,7 @@
           <p:cNvPr id="27" name="">
             <a:extLst xmlns:a="http://schemas.openxmlformats.org/drawingml/2006/main">
               <a:ext uri="{FF2B5EF4-FFF2-40B4-BE49-F238E27FC236}">
-                <a16:creationId xmlns:a16="http://schemas.microsoft.com/office/drawing/2014/main" id="{DD0750BC-2A21-46F0-896B-E61942A86F0D}"/>
+                <a16:creationId xmlns:a16="http://schemas.microsoft.com/office/drawing/2014/main" id="{F1352562-F380-4A4A-8360-3A08ECD1BE80}"/>
               </a:ext>
             </a:extLst>
           </p:cNvPr>
@@ -5457,7 +5457,7 @@
           <p:cNvPr id="28" name="">
             <a:extLst xmlns:a="http://schemas.openxmlformats.org/drawingml/2006/main">
               <a:ext uri="{FF2B5EF4-FFF2-40B4-BE49-F238E27FC236}">
-                <a16:creationId xmlns:a16="http://schemas.microsoft.com/office/drawing/2014/main" id="{8A65AF7D-A320-4011-81E5-4FF78499FD82}"/>
+                <a16:creationId xmlns:a16="http://schemas.microsoft.com/office/drawing/2014/main" id="{6F77EEF0-A0A5-4FD1-B3E2-9A544E2F4084}"/>
               </a:ext>
             </a:extLst>
           </p:cNvPr>
@@ -5484,7 +5484,7 @@
           <p:cNvPr id="29" name="">
             <a:extLst xmlns:a="http://schemas.openxmlformats.org/drawingml/2006/main">
               <a:ext uri="{FF2B5EF4-FFF2-40B4-BE49-F238E27FC236}">
-                <a16:creationId xmlns:a16="http://schemas.microsoft.com/office/drawing/2014/main" id="{08DECB79-95F7-423C-9562-D2B2CDB36D96}"/>
+                <a16:creationId xmlns:a16="http://schemas.microsoft.com/office/drawing/2014/main" id="{8D4561E1-A7F4-4A34-98B2-35CD97074E48}"/>
               </a:ext>
             </a:extLst>
           </p:cNvPr>
@@ -5529,7 +5529,7 @@
           <p:cNvPr id="30" name="">
             <a:extLst xmlns:a="http://schemas.openxmlformats.org/drawingml/2006/main">
               <a:ext uri="{FF2B5EF4-FFF2-40B4-BE49-F238E27FC236}">
-                <a16:creationId xmlns:a16="http://schemas.microsoft.com/office/drawing/2014/main" id="{F4CB6F2F-1552-43E6-9C26-DD2FF45577E9}"/>
+                <a16:creationId xmlns:a16="http://schemas.microsoft.com/office/drawing/2014/main" id="{D9BAF01D-BFFA-4315-BDF5-93065F95DECF}"/>
               </a:ext>
             </a:extLst>
           </p:cNvPr>
@@ -5556,7 +5556,7 @@
           <p:cNvPr id="31" name="">
             <a:extLst xmlns:a="http://schemas.openxmlformats.org/drawingml/2006/main">
               <a:ext uri="{FF2B5EF4-FFF2-40B4-BE49-F238E27FC236}">
-                <a16:creationId xmlns:a16="http://schemas.microsoft.com/office/drawing/2014/main" id="{E40D00B5-7FAE-4AB6-848F-0FC6464A2DF8}"/>
+                <a16:creationId xmlns:a16="http://schemas.microsoft.com/office/drawing/2014/main" id="{F9429B54-AD52-4AF8-A65F-307141FADC3A}"/>
               </a:ext>
             </a:extLst>
           </p:cNvPr>
@@ -5601,7 +5601,7 @@
           <p:cNvPr id="32" name="">
             <a:extLst xmlns:a="http://schemas.openxmlformats.org/drawingml/2006/main">
               <a:ext uri="{FF2B5EF4-FFF2-40B4-BE49-F238E27FC236}">
-                <a16:creationId xmlns:a16="http://schemas.microsoft.com/office/drawing/2014/main" id="{18B8DF0B-8212-4B90-8511-5B99B33FA66F}"/>
+                <a16:creationId xmlns:a16="http://schemas.microsoft.com/office/drawing/2014/main" id="{04FE0260-A64B-4F83-8086-C0C0436A6726}"/>
               </a:ext>
             </a:extLst>
           </p:cNvPr>
@@ -5628,7 +5628,7 @@
           <p:cNvPr id="33" name="">
             <a:extLst xmlns:a="http://schemas.openxmlformats.org/drawingml/2006/main">
               <a:ext uri="{FF2B5EF4-FFF2-40B4-BE49-F238E27FC236}">
-                <a16:creationId xmlns:a16="http://schemas.microsoft.com/office/drawing/2014/main" id="{BD4E3D56-990A-4222-8C0B-657D915709E4}"/>
+                <a16:creationId xmlns:a16="http://schemas.microsoft.com/office/drawing/2014/main" id="{074C2385-DED2-443F-BF22-6E5DBA0738F3}"/>
               </a:ext>
             </a:extLst>
           </p:cNvPr>
@@ -5673,7 +5673,7 @@
           <p:cNvPr id="34" name="">
             <a:extLst xmlns:a="http://schemas.openxmlformats.org/drawingml/2006/main">
               <a:ext uri="{FF2B5EF4-FFF2-40B4-BE49-F238E27FC236}">
-                <a16:creationId xmlns:a16="http://schemas.microsoft.com/office/drawing/2014/main" id="{8D53C1A0-4DEA-4DFA-A86C-B78F71A83C6D}"/>
+                <a16:creationId xmlns:a16="http://schemas.microsoft.com/office/drawing/2014/main" id="{3F12CB06-186D-46D3-B8F5-C5DFE4B7888B}"/>
               </a:ext>
             </a:extLst>
           </p:cNvPr>
@@ -5700,7 +5700,7 @@
           <p:cNvPr id="35" name="">
             <a:extLst xmlns:a="http://schemas.openxmlformats.org/drawingml/2006/main">
               <a:ext uri="{FF2B5EF4-FFF2-40B4-BE49-F238E27FC236}">
-                <a16:creationId xmlns:a16="http://schemas.microsoft.com/office/drawing/2014/main" id="{720E7626-B3A2-4D99-ACA5-B1A87DCBC0BA}"/>
+                <a16:creationId xmlns:a16="http://schemas.microsoft.com/office/drawing/2014/main" id="{B1C850DE-7EA1-411B-A021-06C2961C1F19}"/>
               </a:ext>
             </a:extLst>
           </p:cNvPr>
@@ -5745,7 +5745,7 @@
           <p:cNvPr id="36" name="">
             <a:extLst xmlns:a="http://schemas.openxmlformats.org/drawingml/2006/main">
               <a:ext uri="{FF2B5EF4-FFF2-40B4-BE49-F238E27FC236}">
-                <a16:creationId xmlns:a16="http://schemas.microsoft.com/office/drawing/2014/main" id="{B6F279BF-CF8B-4887-8853-EFA6BF410139}"/>
+                <a16:creationId xmlns:a16="http://schemas.microsoft.com/office/drawing/2014/main" id="{7038F7A9-C1B1-4AC6-AAF2-D6DF058E25DF}"/>
               </a:ext>
             </a:extLst>
           </p:cNvPr>
@@ -5772,7 +5772,7 @@
           <p:cNvPr id="37" name="">
             <a:extLst xmlns:a="http://schemas.openxmlformats.org/drawingml/2006/main">
               <a:ext uri="{FF2B5EF4-FFF2-40B4-BE49-F238E27FC236}">
-                <a16:creationId xmlns:a16="http://schemas.microsoft.com/office/drawing/2014/main" id="{825C7CF6-2DBD-4BA5-8666-EB76EDE3E02A}"/>
+                <a16:creationId xmlns:a16="http://schemas.microsoft.com/office/drawing/2014/main" id="{D56C0AD4-E848-4B57-94C6-AA4F514853FC}"/>
               </a:ext>
             </a:extLst>
           </p:cNvPr>
@@ -5817,7 +5817,7 @@
           <p:cNvPr id="38" name="">
             <a:extLst xmlns:a="http://schemas.openxmlformats.org/drawingml/2006/main">
               <a:ext uri="{FF2B5EF4-FFF2-40B4-BE49-F238E27FC236}">
-                <a16:creationId xmlns:a16="http://schemas.microsoft.com/office/drawing/2014/main" id="{AA6F8BDD-6892-44BA-899B-1F51F804C32B}"/>
+                <a16:creationId xmlns:a16="http://schemas.microsoft.com/office/drawing/2014/main" id="{FB00E7FC-984F-4F38-BFC7-F1874E27614F}"/>
               </a:ext>
             </a:extLst>
           </p:cNvPr>
@@ -5844,7 +5844,7 @@
           <p:cNvPr id="39" name="">
             <a:extLst xmlns:a="http://schemas.openxmlformats.org/drawingml/2006/main">
               <a:ext uri="{FF2B5EF4-FFF2-40B4-BE49-F238E27FC236}">
-                <a16:creationId xmlns:a16="http://schemas.microsoft.com/office/drawing/2014/main" id="{13911D66-DC2D-4122-B494-098B165E802E}"/>
+                <a16:creationId xmlns:a16="http://schemas.microsoft.com/office/drawing/2014/main" id="{948E48A1-97AF-4EB6-BA95-1424DD18B63A}"/>
               </a:ext>
             </a:extLst>
           </p:cNvPr>
@@ -5889,7 +5889,7 @@
           <p:cNvPr id="40" name="">
             <a:extLst xmlns:a="http://schemas.openxmlformats.org/drawingml/2006/main">
               <a:ext uri="{FF2B5EF4-FFF2-40B4-BE49-F238E27FC236}">
-                <a16:creationId xmlns:a16="http://schemas.microsoft.com/office/drawing/2014/main" id="{4D291230-1CC9-482F-8855-18B3E58F60D0}"/>
+                <a16:creationId xmlns:a16="http://schemas.microsoft.com/office/drawing/2014/main" id="{A8D60EB1-33E3-44F5-80A4-C03FAFC6B8B2}"/>
               </a:ext>
             </a:extLst>
           </p:cNvPr>
@@ -5916,7 +5916,7 @@
           <p:cNvPr id="41" name="">
             <a:extLst xmlns:a="http://schemas.openxmlformats.org/drawingml/2006/main">
               <a:ext uri="{FF2B5EF4-FFF2-40B4-BE49-F238E27FC236}">
-                <a16:creationId xmlns:a16="http://schemas.microsoft.com/office/drawing/2014/main" id="{6D6AD535-5A4B-4F6F-99E0-0BC3CE5B6F71}"/>
+                <a16:creationId xmlns:a16="http://schemas.microsoft.com/office/drawing/2014/main" id="{470DD977-C7A6-4953-BC86-C41A6BC1FAE2}"/>
               </a:ext>
             </a:extLst>
           </p:cNvPr>
@@ -5965,10 +5965,10 @@
           <p:nvPr/>
         </p:nvPicPr>
         <p:blipFill>
-          <a:blip xmlns:r="http://schemas.openxmlformats.org/officeDocument/2006/relationships" xmlns:a="http://schemas.openxmlformats.org/drawingml/2006/main" r:embed="Rbf16fc2e784943dd">
+          <a:blip xmlns:r="http://schemas.openxmlformats.org/officeDocument/2006/relationships" xmlns:a="http://schemas.openxmlformats.org/drawingml/2006/main" r:embed="R80412d5f58784358">
             <a:extLst>
               <a:ext uri="{96DAC541-7B7A-43D3-8B79-37D633B846F1}">
-                <asvg:svgBlip xmlns:asvg="http://schemas.microsoft.com/office/drawing/2016/SVG/main" r:embed="Rd7b4b64d63b2497f"/>
+                <asvg:svgBlip xmlns:asvg="http://schemas.microsoft.com/office/drawing/2016/SVG/main" r:embed="R4c11bdb3cc8e4308"/>
               </a:ext>
             </a:extLst>
           </a:blip>
@@ -5989,7 +5989,7 @@
           <p:cNvPr id="43" name="footer">
             <a:extLst xmlns:a="http://schemas.openxmlformats.org/drawingml/2006/main">
               <a:ext uri="{FF2B5EF4-FFF2-40B4-BE49-F238E27FC236}">
-                <a16:creationId xmlns:a16="http://schemas.microsoft.com/office/drawing/2014/main" id="{FA043FCE-FDFB-439D-A8AF-2CE7B873CA4E}"/>
+                <a16:creationId xmlns:a16="http://schemas.microsoft.com/office/drawing/2014/main" id="{1BE87A8E-E8F0-4939-9AB1-CBC45B3663C8}"/>
               </a:ext>
             </a:extLst>
           </p:cNvPr>
@@ -6032,7 +6032,7 @@
     </p:spTree>
     <p:extLst>
       <p:ext uri="{BB962C8B-B14F-4D97-AF65-F5344CB8AC3E}">
-        <p14:creationId xmlns:p14="http://schemas.microsoft.com/office/powerpoint/2010/main" val="885401091"/>
+        <p14:creationId xmlns:p14="http://schemas.microsoft.com/office/powerpoint/2010/main" val="54257557"/>
       </p:ext>
     </p:extLst>
   </p:cSld>
@@ -6056,7 +6056,7 @@
           <p:cNvPr id="1" name="slide-title">
             <a:extLst xmlns:a="http://schemas.openxmlformats.org/drawingml/2006/main">
               <a:ext uri="{FF2B5EF4-FFF2-40B4-BE49-F238E27FC236}">
-                <a16:creationId xmlns:a16="http://schemas.microsoft.com/office/drawing/2014/main" id="{5247F2A7-1F8E-40BC-B7C6-435A0283C646}"/>
+                <a16:creationId xmlns:a16="http://schemas.microsoft.com/office/drawing/2014/main" id="{7737E777-72D0-4697-A623-8EAD0DEC08A0}"/>
               </a:ext>
             </a:extLst>
           </p:cNvPr>
@@ -6101,7 +6101,7 @@
           <p:cNvPr id="2" name="">
             <a:extLst xmlns:a="http://schemas.openxmlformats.org/drawingml/2006/main">
               <a:ext uri="{FF2B5EF4-FFF2-40B4-BE49-F238E27FC236}">
-                <a16:creationId xmlns:a16="http://schemas.microsoft.com/office/drawing/2014/main" id="{5F9702C3-6F52-44CD-91C6-1A0D74CD7CAC}"/>
+                <a16:creationId xmlns:a16="http://schemas.microsoft.com/office/drawing/2014/main" id="{47B94CE1-3E94-4B3F-A0B6-C4BECC02A194}"/>
               </a:ext>
             </a:extLst>
           </p:cNvPr>
@@ -6138,10 +6138,10 @@
           <p:nvPr/>
         </p:nvPicPr>
         <p:blipFill>
-          <a:blip xmlns:r="http://schemas.openxmlformats.org/officeDocument/2006/relationships" xmlns:a="http://schemas.openxmlformats.org/drawingml/2006/main" r:embed="Ra4ea5a018ba84ee9">
+          <a:blip xmlns:r="http://schemas.openxmlformats.org/officeDocument/2006/relationships" xmlns:a="http://schemas.openxmlformats.org/drawingml/2006/main" r:embed="R98ed66f133f14fc8">
             <a:extLst>
               <a:ext uri="{96DAC541-7B7A-43D3-8B79-37D633B846F1}">
-                <asvg:svgBlip xmlns:asvg="http://schemas.microsoft.com/office/drawing/2016/SVG/main" r:embed="Rb96e98b5284b4d08"/>
+                <asvg:svgBlip xmlns:asvg="http://schemas.microsoft.com/office/drawing/2016/SVG/main" r:embed="R13fea2e1901743ab"/>
               </a:ext>
             </a:extLst>
           </a:blip>
@@ -6162,7 +6162,7 @@
           <p:cNvPr id="4" name="">
             <a:extLst xmlns:a="http://schemas.openxmlformats.org/drawingml/2006/main">
               <a:ext uri="{FF2B5EF4-FFF2-40B4-BE49-F238E27FC236}">
-                <a16:creationId xmlns:a16="http://schemas.microsoft.com/office/drawing/2014/main" id="{456EAFDE-3471-472D-AFB7-2D9B8F77BA36}"/>
+                <a16:creationId xmlns:a16="http://schemas.microsoft.com/office/drawing/2014/main" id="{872A5733-D920-4CA3-8EB4-E74B8CF7E250}"/>
               </a:ext>
             </a:extLst>
           </p:cNvPr>
@@ -6191,18 +6191,18 @@
           <p:cNvPr id="5" name="">
             <a:extLst xmlns:a="http://schemas.openxmlformats.org/drawingml/2006/main">
               <a:ext uri="{FF2B5EF4-FFF2-40B4-BE49-F238E27FC236}">
-                <a16:creationId xmlns:a16="http://schemas.microsoft.com/office/drawing/2014/main" id="{2A0BD10C-B573-47AC-82CB-55AE72D1BC63}"/>
-              </a:ext>
-            </a:extLst>
-          </p:cNvPr>
-          <p:cNvSpPr>
-            <a:spLocks xmlns:a="http://schemas.openxmlformats.org/drawingml/2006/main" noGrp="1"/>
-          </p:cNvSpPr>
-          <p:nvPr/>
-        </p:nvSpPr>
-        <p:spPr>
-          <a:xfrm xmlns:a="http://schemas.openxmlformats.org/drawingml/2006/main">
-            <a:off x="990600" y="7600950"/>
+                <a16:creationId xmlns:a16="http://schemas.microsoft.com/office/drawing/2014/main" id="{D640B9CF-5EBF-40FE-AC5D-9118C7746BE1}"/>
+              </a:ext>
+            </a:extLst>
+          </p:cNvPr>
+          <p:cNvSpPr>
+            <a:spLocks xmlns:a="http://schemas.openxmlformats.org/drawingml/2006/main" noGrp="1"/>
+          </p:cNvSpPr>
+          <p:nvPr/>
+        </p:nvSpPr>
+        <p:spPr>
+          <a:xfrm xmlns:a="http://schemas.openxmlformats.org/drawingml/2006/main">
+            <a:off x="990600" y="7429500"/>
             <a:ext cx="4829175" cy="381000"/>
           </a:xfrm>
           <a:prstGeom xmlns:a="http://schemas.openxmlformats.org/drawingml/2006/main" prst="rect">
@@ -6236,19 +6236,19 @@
           <p:cNvPr id="6" name="">
             <a:extLst xmlns:a="http://schemas.openxmlformats.org/drawingml/2006/main">
               <a:ext uri="{FF2B5EF4-FFF2-40B4-BE49-F238E27FC236}">
-                <a16:creationId xmlns:a16="http://schemas.microsoft.com/office/drawing/2014/main" id="{1120B59B-8CC7-49DB-9CBD-6E4AAD8BD9A6}"/>
-              </a:ext>
-            </a:extLst>
-          </p:cNvPr>
-          <p:cNvSpPr>
-            <a:spLocks xmlns:a="http://schemas.openxmlformats.org/drawingml/2006/main" noGrp="1"/>
-          </p:cNvSpPr>
-          <p:nvPr/>
-        </p:nvSpPr>
-        <p:spPr>
-          <a:xfrm xmlns:a="http://schemas.openxmlformats.org/drawingml/2006/main">
-            <a:off x="990600" y="8077200"/>
-            <a:ext cx="4829175" cy="333375"/>
+                <a16:creationId xmlns:a16="http://schemas.microsoft.com/office/drawing/2014/main" id="{69D8F984-049C-4B71-B03F-65906EAC0A82}"/>
+              </a:ext>
+            </a:extLst>
+          </p:cNvPr>
+          <p:cNvSpPr>
+            <a:spLocks xmlns:a="http://schemas.openxmlformats.org/drawingml/2006/main" noGrp="1"/>
+          </p:cNvSpPr>
+          <p:nvPr/>
+        </p:nvSpPr>
+        <p:spPr>
+          <a:xfrm xmlns:a="http://schemas.openxmlformats.org/drawingml/2006/main">
+            <a:off x="990600" y="7905750"/>
+            <a:ext cx="4829175" cy="666750"/>
           </a:xfrm>
           <a:prstGeom xmlns:a="http://schemas.openxmlformats.org/drawingml/2006/main" prst="rect">
             <a:avLst/>
@@ -6271,7 +6271,7 @@
                   <a:srgbClr val="173442"/>
                 </a:solidFill>
               </a:rPr>
-              <a:t>1,287 instructions compared step by step</a:t>
+              <a:t>49,149 instructions in 11 programs, compared step by step</a:t>
             </a:r>
           </a:p>
         </p:txBody>
@@ -6281,7 +6281,7 @@
           <p:cNvPr id="7" name="">
             <a:extLst xmlns:a="http://schemas.openxmlformats.org/drawingml/2006/main">
               <a:ext uri="{FF2B5EF4-FFF2-40B4-BE49-F238E27FC236}">
-                <a16:creationId xmlns:a16="http://schemas.microsoft.com/office/drawing/2014/main" id="{2DE0454A-D136-4D6A-A96D-9EEE7F36AD90}"/>
+                <a16:creationId xmlns:a16="http://schemas.microsoft.com/office/drawing/2014/main" id="{649515D7-DC03-49F1-8B0C-1F404D0326F1}"/>
               </a:ext>
             </a:extLst>
           </p:cNvPr>
@@ -6310,7 +6310,7 @@
           <p:cNvPr id="8" name="">
             <a:extLst xmlns:a="http://schemas.openxmlformats.org/drawingml/2006/main">
               <a:ext uri="{FF2B5EF4-FFF2-40B4-BE49-F238E27FC236}">
-                <a16:creationId xmlns:a16="http://schemas.microsoft.com/office/drawing/2014/main" id="{320B9855-4340-4DB9-9CBB-0E7FA5783694}"/>
+                <a16:creationId xmlns:a16="http://schemas.microsoft.com/office/drawing/2014/main" id="{800B703B-BD6B-4CF7-ACC1-5257FD3987DF}"/>
               </a:ext>
             </a:extLst>
           </p:cNvPr>
@@ -6355,7 +6355,7 @@
           <p:cNvPr id="9" name="">
             <a:extLst xmlns:a="http://schemas.openxmlformats.org/drawingml/2006/main">
               <a:ext uri="{FF2B5EF4-FFF2-40B4-BE49-F238E27FC236}">
-                <a16:creationId xmlns:a16="http://schemas.microsoft.com/office/drawing/2014/main" id="{14C68059-5E04-4885-9602-5D7AD1A930F6}"/>
+                <a16:creationId xmlns:a16="http://schemas.microsoft.com/office/drawing/2014/main" id="{0D4AF242-FE02-4CA0-8D64-9432F2AA06AC}"/>
               </a:ext>
             </a:extLst>
           </p:cNvPr>
@@ -6400,7 +6400,7 @@
           <p:cNvPr id="10" name="">
             <a:extLst xmlns:a="http://schemas.openxmlformats.org/drawingml/2006/main">
               <a:ext uri="{FF2B5EF4-FFF2-40B4-BE49-F238E27FC236}">
-                <a16:creationId xmlns:a16="http://schemas.microsoft.com/office/drawing/2014/main" id="{B12250B7-CA79-4C07-949C-EFD2955F35C8}"/>
+                <a16:creationId xmlns:a16="http://schemas.microsoft.com/office/drawing/2014/main" id="{02F9DA20-CF13-4A41-96E2-DD943E9F172C}"/>
               </a:ext>
             </a:extLst>
           </p:cNvPr>
@@ -6429,7 +6429,7 @@
           <p:cNvPr id="11" name="">
             <a:extLst xmlns:a="http://schemas.openxmlformats.org/drawingml/2006/main">
               <a:ext uri="{FF2B5EF4-FFF2-40B4-BE49-F238E27FC236}">
-                <a16:creationId xmlns:a16="http://schemas.microsoft.com/office/drawing/2014/main" id="{A86EEA74-2614-4406-B4A9-0BA37B5CF288}"/>
+                <a16:creationId xmlns:a16="http://schemas.microsoft.com/office/drawing/2014/main" id="{C6EAA02F-F58A-4E4C-808B-84D61B86F844}"/>
               </a:ext>
             </a:extLst>
           </p:cNvPr>
@@ -6474,7 +6474,7 @@
           <p:cNvPr id="12" name="">
             <a:extLst xmlns:a="http://schemas.openxmlformats.org/drawingml/2006/main">
               <a:ext uri="{FF2B5EF4-FFF2-40B4-BE49-F238E27FC236}">
-                <a16:creationId xmlns:a16="http://schemas.microsoft.com/office/drawing/2014/main" id="{09ECAA5F-9E88-4CFE-A59E-6EE66DB42390}"/>
+                <a16:creationId xmlns:a16="http://schemas.microsoft.com/office/drawing/2014/main" id="{A482A41C-00EF-40D0-9FD3-91DEDDCC92BF}"/>
               </a:ext>
             </a:extLst>
           </p:cNvPr>
@@ -6509,7 +6509,7 @@
                   <a:srgbClr val="173442"/>
                 </a:solidFill>
               </a:rPr>
-              <a:t>16 injected RTL defects; each makes a named bench fail</a:t>
+              <a:t>25 injected RTL defects; each makes a named bench fail</a:t>
             </a:r>
           </a:p>
         </p:txBody>
@@ -6519,7 +6519,7 @@
           <p:cNvPr id="13" name="">
             <a:extLst xmlns:a="http://schemas.openxmlformats.org/drawingml/2006/main">
               <a:ext uri="{FF2B5EF4-FFF2-40B4-BE49-F238E27FC236}">
-                <a16:creationId xmlns:a16="http://schemas.microsoft.com/office/drawing/2014/main" id="{65A6AB4B-B7C3-45AF-9EBB-27F89FA81465}"/>
+                <a16:creationId xmlns:a16="http://schemas.microsoft.com/office/drawing/2014/main" id="{FC49A3CF-0923-46AD-9C5C-C574FD9AF396}"/>
               </a:ext>
             </a:extLst>
           </p:cNvPr>
@@ -6554,7 +6554,7 @@
                   <a:srgbClr val="526772"/>
                 </a:solidFill>
               </a:rPr>
-              <a:t>ModelSim: 22 CPU/PIC configurations   ·   Verilator: 16 benches with assertions bound to the RTL</a:t>
+              <a:t>ModelSim: 39 CPU/PIC runs   ·   Verilator: 17 benches, 53 runs with assertions bound to the RTL</a:t>
             </a:r>
           </a:p>
         </p:txBody>
@@ -6564,7 +6564,7 @@
           <p:cNvPr id="14" name="footer">
             <a:extLst xmlns:a="http://schemas.openxmlformats.org/drawingml/2006/main">
               <a:ext uri="{FF2B5EF4-FFF2-40B4-BE49-F238E27FC236}">
-                <a16:creationId xmlns:a16="http://schemas.microsoft.com/office/drawing/2014/main" id="{44DAE41A-C2A7-466F-B63A-39CDDC1F8803}"/>
+                <a16:creationId xmlns:a16="http://schemas.microsoft.com/office/drawing/2014/main" id="{FDA0AC89-8C32-4D6F-B21D-46369AAD8C23}"/>
               </a:ext>
             </a:extLst>
           </p:cNvPr>
@@ -6607,7 +6607,7 @@
     </p:spTree>
     <p:extLst>
       <p:ext uri="{BB962C8B-B14F-4D97-AF65-F5344CB8AC3E}">
-        <p14:creationId xmlns:p14="http://schemas.microsoft.com/office/powerpoint/2010/main" val="1640654030"/>
+        <p14:creationId xmlns:p14="http://schemas.microsoft.com/office/powerpoint/2010/main" val="905277585"/>
       </p:ext>
     </p:extLst>
   </p:cSld>
@@ -6631,7 +6631,7 @@
           <p:cNvPr id="1" name="slide-title">
             <a:extLst xmlns:a="http://schemas.openxmlformats.org/drawingml/2006/main">
               <a:ext uri="{FF2B5EF4-FFF2-40B4-BE49-F238E27FC236}">
-                <a16:creationId xmlns:a16="http://schemas.microsoft.com/office/drawing/2014/main" id="{7D040B22-64FC-4AB1-9289-D4CB9127EF8B}"/>
+                <a16:creationId xmlns:a16="http://schemas.microsoft.com/office/drawing/2014/main" id="{CAF0A6C6-3795-4212-98E9-5514C05FE6EC}"/>
               </a:ext>
             </a:extLst>
           </p:cNvPr>
@@ -6676,7 +6676,7 @@
           <p:cNvPr id="2" name="">
             <a:extLst xmlns:a="http://schemas.openxmlformats.org/drawingml/2006/main">
               <a:ext uri="{FF2B5EF4-FFF2-40B4-BE49-F238E27FC236}">
-                <a16:creationId xmlns:a16="http://schemas.microsoft.com/office/drawing/2014/main" id="{CD267B1F-28AD-4C42-8BA1-8E86875E0B00}"/>
+                <a16:creationId xmlns:a16="http://schemas.microsoft.com/office/drawing/2014/main" id="{069174D1-9C78-4AFC-8FAE-6125D0DB21BA}"/>
               </a:ext>
             </a:extLst>
           </p:cNvPr>
@@ -6713,10 +6713,10 @@
           <p:nvPr/>
         </p:nvPicPr>
         <p:blipFill>
-          <a:blip xmlns:r="http://schemas.openxmlformats.org/officeDocument/2006/relationships" xmlns:a="http://schemas.openxmlformats.org/drawingml/2006/main" r:embed="R31991bd572754057">
+          <a:blip xmlns:r="http://schemas.openxmlformats.org/officeDocument/2006/relationships" xmlns:a="http://schemas.openxmlformats.org/drawingml/2006/main" r:embed="R7fe65453458b46aa">
             <a:extLst>
               <a:ext uri="{96DAC541-7B7A-43D3-8B79-37D633B846F1}">
-                <asvg:svgBlip xmlns:asvg="http://schemas.microsoft.com/office/drawing/2016/SVG/main" r:embed="R40cb9a4dd21e405f"/>
+                <asvg:svgBlip xmlns:asvg="http://schemas.microsoft.com/office/drawing/2016/SVG/main" r:embed="Rf67c2f39216c4071"/>
               </a:ext>
             </a:extLst>
           </a:blip>
@@ -6737,7 +6737,7 @@
           <p:cNvPr id="4" name="">
             <a:extLst xmlns:a="http://schemas.openxmlformats.org/drawingml/2006/main">
               <a:ext uri="{FF2B5EF4-FFF2-40B4-BE49-F238E27FC236}">
-                <a16:creationId xmlns:a16="http://schemas.microsoft.com/office/drawing/2014/main" id="{D3F9767B-2972-4E0C-AC7A-9738670AEE7D}"/>
+                <a16:creationId xmlns:a16="http://schemas.microsoft.com/office/drawing/2014/main" id="{05352F5F-92B1-474F-9BC0-48FF1887472D}"/>
               </a:ext>
             </a:extLst>
           </p:cNvPr>
@@ -6766,7 +6766,7 @@
           <p:cNvPr id="5" name="">
             <a:extLst xmlns:a="http://schemas.openxmlformats.org/drawingml/2006/main">
               <a:ext uri="{FF2B5EF4-FFF2-40B4-BE49-F238E27FC236}">
-                <a16:creationId xmlns:a16="http://schemas.microsoft.com/office/drawing/2014/main" id="{B3BC8EB9-163D-4824-A9E8-9F55F1891285}"/>
+                <a16:creationId xmlns:a16="http://schemas.microsoft.com/office/drawing/2014/main" id="{D816B3DD-E98E-4E7F-8589-2FD4117890A0}"/>
               </a:ext>
             </a:extLst>
           </p:cNvPr>
@@ -6811,7 +6811,7 @@
           <p:cNvPr id="6" name="">
             <a:extLst xmlns:a="http://schemas.openxmlformats.org/drawingml/2006/main">
               <a:ext uri="{FF2B5EF4-FFF2-40B4-BE49-F238E27FC236}">
-                <a16:creationId xmlns:a16="http://schemas.microsoft.com/office/drawing/2014/main" id="{A5C56EFE-432A-4953-A34A-0A4C1B3A2736}"/>
+                <a16:creationId xmlns:a16="http://schemas.microsoft.com/office/drawing/2014/main" id="{F42CD633-D67E-4206-A204-B626438195B0}"/>
               </a:ext>
             </a:extLst>
           </p:cNvPr>
@@ -6856,7 +6856,7 @@
           <p:cNvPr id="7" name="">
             <a:extLst xmlns:a="http://schemas.openxmlformats.org/drawingml/2006/main">
               <a:ext uri="{FF2B5EF4-FFF2-40B4-BE49-F238E27FC236}">
-                <a16:creationId xmlns:a16="http://schemas.microsoft.com/office/drawing/2014/main" id="{7EB62238-E392-4D75-97C9-FF3E17E67AE4}"/>
+                <a16:creationId xmlns:a16="http://schemas.microsoft.com/office/drawing/2014/main" id="{D242C873-C287-4B0A-B74A-2B93FBF042EE}"/>
               </a:ext>
             </a:extLst>
           </p:cNvPr>
@@ -6885,7 +6885,7 @@
           <p:cNvPr id="8" name="">
             <a:extLst xmlns:a="http://schemas.openxmlformats.org/drawingml/2006/main">
               <a:ext uri="{FF2B5EF4-FFF2-40B4-BE49-F238E27FC236}">
-                <a16:creationId xmlns:a16="http://schemas.microsoft.com/office/drawing/2014/main" id="{6FBA0CE2-5BD8-41D1-A46B-141AA9D3AEFB}"/>
+                <a16:creationId xmlns:a16="http://schemas.microsoft.com/office/drawing/2014/main" id="{BF27D57E-1140-4C25-BBAD-1332719F1103}"/>
               </a:ext>
             </a:extLst>
           </p:cNvPr>
@@ -6930,7 +6930,7 @@
           <p:cNvPr id="9" name="">
             <a:extLst xmlns:a="http://schemas.openxmlformats.org/drawingml/2006/main">
               <a:ext uri="{FF2B5EF4-FFF2-40B4-BE49-F238E27FC236}">
-                <a16:creationId xmlns:a16="http://schemas.microsoft.com/office/drawing/2014/main" id="{3395DC41-9668-46A4-AE4E-EE6567B9C788}"/>
+                <a16:creationId xmlns:a16="http://schemas.microsoft.com/office/drawing/2014/main" id="{847E5B40-C92B-4110-92B8-99501A0A578B}"/>
               </a:ext>
             </a:extLst>
           </p:cNvPr>
@@ -6975,7 +6975,7 @@
           <p:cNvPr id="10" name="">
             <a:extLst xmlns:a="http://schemas.openxmlformats.org/drawingml/2006/main">
               <a:ext uri="{FF2B5EF4-FFF2-40B4-BE49-F238E27FC236}">
-                <a16:creationId xmlns:a16="http://schemas.microsoft.com/office/drawing/2014/main" id="{42EA6077-0EC6-4430-87E8-29592758CCE9}"/>
+                <a16:creationId xmlns:a16="http://schemas.microsoft.com/office/drawing/2014/main" id="{C1ED549F-3C63-46D8-A74D-12BF27E287DB}"/>
               </a:ext>
             </a:extLst>
           </p:cNvPr>
@@ -7004,7 +7004,7 @@
           <p:cNvPr id="11" name="">
             <a:extLst xmlns:a="http://schemas.openxmlformats.org/drawingml/2006/main">
               <a:ext uri="{FF2B5EF4-FFF2-40B4-BE49-F238E27FC236}">
-                <a16:creationId xmlns:a16="http://schemas.microsoft.com/office/drawing/2014/main" id="{6FF751A5-5AE2-499F-A8CB-7AE9F6DFBDA4}"/>
+                <a16:creationId xmlns:a16="http://schemas.microsoft.com/office/drawing/2014/main" id="{0C4A4D8A-0500-4207-A6EF-7C5AFBC5DE39}"/>
               </a:ext>
             </a:extLst>
           </p:cNvPr>
@@ -7049,7 +7049,7 @@
           <p:cNvPr id="12" name="">
             <a:extLst xmlns:a="http://schemas.openxmlformats.org/drawingml/2006/main">
               <a:ext uri="{FF2B5EF4-FFF2-40B4-BE49-F238E27FC236}">
-                <a16:creationId xmlns:a16="http://schemas.microsoft.com/office/drawing/2014/main" id="{BA978095-ABF4-4E17-8C09-619F3C5D2DF6}"/>
+                <a16:creationId xmlns:a16="http://schemas.microsoft.com/office/drawing/2014/main" id="{C3B7C2E3-7DD1-44A1-8337-B8FBE7EFF852}"/>
               </a:ext>
             </a:extLst>
           </p:cNvPr>
@@ -7094,7 +7094,7 @@
           <p:cNvPr id="13" name="">
             <a:extLst xmlns:a="http://schemas.openxmlformats.org/drawingml/2006/main">
               <a:ext uri="{FF2B5EF4-FFF2-40B4-BE49-F238E27FC236}">
-                <a16:creationId xmlns:a16="http://schemas.microsoft.com/office/drawing/2014/main" id="{08D68C4A-CA96-4E01-A4EC-2D41BC420273}"/>
+                <a16:creationId xmlns:a16="http://schemas.microsoft.com/office/drawing/2014/main" id="{2DD0E999-24A3-41D8-B773-99050C47927F}"/>
               </a:ext>
             </a:extLst>
           </p:cNvPr>
@@ -7139,7 +7139,7 @@
           <p:cNvPr id="14" name="footer">
             <a:extLst xmlns:a="http://schemas.openxmlformats.org/drawingml/2006/main">
               <a:ext uri="{FF2B5EF4-FFF2-40B4-BE49-F238E27FC236}">
-                <a16:creationId xmlns:a16="http://schemas.microsoft.com/office/drawing/2014/main" id="{97EE05CF-D431-4689-87EE-805C90243F25}"/>
+                <a16:creationId xmlns:a16="http://schemas.microsoft.com/office/drawing/2014/main" id="{1335E88E-7B1B-4A8B-8360-93DC97F67567}"/>
               </a:ext>
             </a:extLst>
           </p:cNvPr>
@@ -7182,7 +7182,7 @@
     </p:spTree>
     <p:extLst>
       <p:ext uri="{BB962C8B-B14F-4D97-AF65-F5344CB8AC3E}">
-        <p14:creationId xmlns:p14="http://schemas.microsoft.com/office/powerpoint/2010/main" val="1325846067"/>
+        <p14:creationId xmlns:p14="http://schemas.microsoft.com/office/powerpoint/2010/main" val="1957218435"/>
       </p:ext>
     </p:extLst>
   </p:cSld>
@@ -7206,7 +7206,7 @@
           <p:cNvPr id="1" name="slide-title">
             <a:extLst xmlns:a="http://schemas.openxmlformats.org/drawingml/2006/main">
               <a:ext uri="{FF2B5EF4-FFF2-40B4-BE49-F238E27FC236}">
-                <a16:creationId xmlns:a16="http://schemas.microsoft.com/office/drawing/2014/main" id="{252CA9CF-5360-4915-B5E9-981DC41B664E}"/>
+                <a16:creationId xmlns:a16="http://schemas.microsoft.com/office/drawing/2014/main" id="{3FD40AEE-ACF8-4268-AF25-743DF2D0531E}"/>
               </a:ext>
             </a:extLst>
           </p:cNvPr>
@@ -7251,7 +7251,7 @@
           <p:cNvPr id="2" name="">
             <a:extLst xmlns:a="http://schemas.openxmlformats.org/drawingml/2006/main">
               <a:ext uri="{FF2B5EF4-FFF2-40B4-BE49-F238E27FC236}">
-                <a16:creationId xmlns:a16="http://schemas.microsoft.com/office/drawing/2014/main" id="{9DE80FA1-F3AF-4F81-AE3B-5070EBCC0134}"/>
+                <a16:creationId xmlns:a16="http://schemas.microsoft.com/office/drawing/2014/main" id="{3646EA51-D08A-4039-B06E-74B0DB167DF7}"/>
               </a:ext>
             </a:extLst>
           </p:cNvPr>
@@ -7284,7 +7284,7 @@
           <p:cNvPr id="3" name="">
             <a:extLst xmlns:a="http://schemas.openxmlformats.org/drawingml/2006/main">
               <a:ext uri="{FF2B5EF4-FFF2-40B4-BE49-F238E27FC236}">
-                <a16:creationId xmlns:a16="http://schemas.microsoft.com/office/drawing/2014/main" id="{6B0F310B-A035-4B8D-ACE5-019BE67053DC}"/>
+                <a16:creationId xmlns:a16="http://schemas.microsoft.com/office/drawing/2014/main" id="{AB85F6FF-00D3-486F-BDB3-C5C769E3B80F}"/>
               </a:ext>
             </a:extLst>
           </p:cNvPr>
@@ -7313,7 +7313,7 @@
           <p:cNvPr id="4" name="">
             <a:extLst xmlns:a="http://schemas.openxmlformats.org/drawingml/2006/main">
               <a:ext uri="{FF2B5EF4-FFF2-40B4-BE49-F238E27FC236}">
-                <a16:creationId xmlns:a16="http://schemas.microsoft.com/office/drawing/2014/main" id="{A98B525E-22BC-472D-A071-CE3DB84FBD29}"/>
+                <a16:creationId xmlns:a16="http://schemas.microsoft.com/office/drawing/2014/main" id="{6870CB33-7D04-4FA3-80ED-1633D07FC973}"/>
               </a:ext>
             </a:extLst>
           </p:cNvPr>
@@ -7358,7 +7358,7 @@
           <p:cNvPr id="5" name="">
             <a:extLst xmlns:a="http://schemas.openxmlformats.org/drawingml/2006/main">
               <a:ext uri="{FF2B5EF4-FFF2-40B4-BE49-F238E27FC236}">
-                <a16:creationId xmlns:a16="http://schemas.microsoft.com/office/drawing/2014/main" id="{38FDDEEB-2314-4F21-B3EF-11887B26ADC8}"/>
+                <a16:creationId xmlns:a16="http://schemas.microsoft.com/office/drawing/2014/main" id="{FE31B19F-A559-4481-A8D3-08691625E152}"/>
               </a:ext>
             </a:extLst>
           </p:cNvPr>
@@ -7403,7 +7403,7 @@
           <p:cNvPr id="6" name="">
             <a:extLst xmlns:a="http://schemas.openxmlformats.org/drawingml/2006/main">
               <a:ext uri="{FF2B5EF4-FFF2-40B4-BE49-F238E27FC236}">
-                <a16:creationId xmlns:a16="http://schemas.microsoft.com/office/drawing/2014/main" id="{1C70FF2B-DF26-4D06-ACBD-C73597F55C9D}"/>
+                <a16:creationId xmlns:a16="http://schemas.microsoft.com/office/drawing/2014/main" id="{78B52975-3D1B-4E1C-A0D8-31DA0D7597FF}"/>
               </a:ext>
             </a:extLst>
           </p:cNvPr>
@@ -7448,7 +7448,7 @@
           <p:cNvPr id="7" name="">
             <a:extLst xmlns:a="http://schemas.openxmlformats.org/drawingml/2006/main">
               <a:ext uri="{FF2B5EF4-FFF2-40B4-BE49-F238E27FC236}">
-                <a16:creationId xmlns:a16="http://schemas.microsoft.com/office/drawing/2014/main" id="{FB069F20-F5FB-429C-9F8C-620E932251FA}"/>
+                <a16:creationId xmlns:a16="http://schemas.microsoft.com/office/drawing/2014/main" id="{C5A15542-9B9B-4BE9-B27A-161A88874E79}"/>
               </a:ext>
             </a:extLst>
           </p:cNvPr>
@@ -7493,7 +7493,7 @@
           <p:cNvPr id="8" name="">
             <a:extLst xmlns:a="http://schemas.openxmlformats.org/drawingml/2006/main">
               <a:ext uri="{FF2B5EF4-FFF2-40B4-BE49-F238E27FC236}">
-                <a16:creationId xmlns:a16="http://schemas.microsoft.com/office/drawing/2014/main" id="{5C071CD4-22AD-4750-B2A6-6394A4676DB7}"/>
+                <a16:creationId xmlns:a16="http://schemas.microsoft.com/office/drawing/2014/main" id="{5C4F3179-8A27-4881-936C-F818D8D79D10}"/>
               </a:ext>
             </a:extLst>
           </p:cNvPr>
@@ -7538,7 +7538,7 @@
           <p:cNvPr id="9" name="">
             <a:extLst xmlns:a="http://schemas.openxmlformats.org/drawingml/2006/main">
               <a:ext uri="{FF2B5EF4-FFF2-40B4-BE49-F238E27FC236}">
-                <a16:creationId xmlns:a16="http://schemas.microsoft.com/office/drawing/2014/main" id="{297E8536-F6E5-486E-A0BB-54C4F3AF6529}"/>
+                <a16:creationId xmlns:a16="http://schemas.microsoft.com/office/drawing/2014/main" id="{1E0DB356-DC11-4A22-8DE6-F0373BFCB034}"/>
               </a:ext>
             </a:extLst>
           </p:cNvPr>
@@ -7583,7 +7583,7 @@
           <p:cNvPr id="10" name="">
             <a:extLst xmlns:a="http://schemas.openxmlformats.org/drawingml/2006/main">
               <a:ext uri="{FF2B5EF4-FFF2-40B4-BE49-F238E27FC236}">
-                <a16:creationId xmlns:a16="http://schemas.microsoft.com/office/drawing/2014/main" id="{BCA3CFF4-4BB8-439C-B883-6602AE768F45}"/>
+                <a16:creationId xmlns:a16="http://schemas.microsoft.com/office/drawing/2014/main" id="{F3826D5C-590F-4B06-BF5C-10F1D9882726}"/>
               </a:ext>
             </a:extLst>
           </p:cNvPr>
@@ -7628,7 +7628,7 @@
           <p:cNvPr id="11" name="">
             <a:extLst xmlns:a="http://schemas.openxmlformats.org/drawingml/2006/main">
               <a:ext uri="{FF2B5EF4-FFF2-40B4-BE49-F238E27FC236}">
-                <a16:creationId xmlns:a16="http://schemas.microsoft.com/office/drawing/2014/main" id="{C34CDB4A-0806-4999-A7FC-AE7346B1AEA4}"/>
+                <a16:creationId xmlns:a16="http://schemas.microsoft.com/office/drawing/2014/main" id="{9D4D8EA5-F15D-4C6B-B6D1-1F557497C1F2}"/>
               </a:ext>
             </a:extLst>
           </p:cNvPr>
@@ -7657,7 +7657,7 @@
           <p:cNvPr id="12" name="">
             <a:extLst xmlns:a="http://schemas.openxmlformats.org/drawingml/2006/main">
               <a:ext uri="{FF2B5EF4-FFF2-40B4-BE49-F238E27FC236}">
-                <a16:creationId xmlns:a16="http://schemas.microsoft.com/office/drawing/2014/main" id="{5A12071A-DB8F-46FB-B86D-F41C88FE9A7D}"/>
+                <a16:creationId xmlns:a16="http://schemas.microsoft.com/office/drawing/2014/main" id="{543F96E0-BB2C-4D69-9563-C45F48488019}"/>
               </a:ext>
             </a:extLst>
           </p:cNvPr>
@@ -7702,7 +7702,7 @@
           <p:cNvPr id="13" name="">
             <a:extLst xmlns:a="http://schemas.openxmlformats.org/drawingml/2006/main">
               <a:ext uri="{FF2B5EF4-FFF2-40B4-BE49-F238E27FC236}">
-                <a16:creationId xmlns:a16="http://schemas.microsoft.com/office/drawing/2014/main" id="{934F3CFA-A8C9-4023-A2CB-0158F0A0C17E}"/>
+                <a16:creationId xmlns:a16="http://schemas.microsoft.com/office/drawing/2014/main" id="{B9198646-A9B1-49CD-9C22-D6CC4730F746}"/>
               </a:ext>
             </a:extLst>
           </p:cNvPr>
@@ -7747,7 +7747,7 @@
           <p:cNvPr id="14" name="">
             <a:extLst xmlns:a="http://schemas.openxmlformats.org/drawingml/2006/main">
               <a:ext uri="{FF2B5EF4-FFF2-40B4-BE49-F238E27FC236}">
-                <a16:creationId xmlns:a16="http://schemas.microsoft.com/office/drawing/2014/main" id="{65EBCCFB-5A18-4635-A180-A75A5960A732}"/>
+                <a16:creationId xmlns:a16="http://schemas.microsoft.com/office/drawing/2014/main" id="{38EB6335-51D8-48BF-89FD-E61F22AAADC9}"/>
               </a:ext>
             </a:extLst>
           </p:cNvPr>
@@ -7792,7 +7792,7 @@
           <p:cNvPr id="15" name="">
             <a:extLst xmlns:a="http://schemas.openxmlformats.org/drawingml/2006/main">
               <a:ext uri="{FF2B5EF4-FFF2-40B4-BE49-F238E27FC236}">
-                <a16:creationId xmlns:a16="http://schemas.microsoft.com/office/drawing/2014/main" id="{19E13C05-73F2-476D-88B3-966DCDE9514D}"/>
+                <a16:creationId xmlns:a16="http://schemas.microsoft.com/office/drawing/2014/main" id="{7BA84C33-5E81-4F46-AA88-E5002C2E04F9}"/>
               </a:ext>
             </a:extLst>
           </p:cNvPr>
@@ -7837,7 +7837,7 @@
           <p:cNvPr id="16" name="">
             <a:extLst xmlns:a="http://schemas.openxmlformats.org/drawingml/2006/main">
               <a:ext uri="{FF2B5EF4-FFF2-40B4-BE49-F238E27FC236}">
-                <a16:creationId xmlns:a16="http://schemas.microsoft.com/office/drawing/2014/main" id="{5011208F-DF40-4733-AEF7-DA2572AFCD12}"/>
+                <a16:creationId xmlns:a16="http://schemas.microsoft.com/office/drawing/2014/main" id="{AFA1A152-77AC-4325-9446-559F6A3BD735}"/>
               </a:ext>
             </a:extLst>
           </p:cNvPr>
@@ -7882,7 +7882,7 @@
           <p:cNvPr id="17" name="">
             <a:extLst xmlns:a="http://schemas.openxmlformats.org/drawingml/2006/main">
               <a:ext uri="{FF2B5EF4-FFF2-40B4-BE49-F238E27FC236}">
-                <a16:creationId xmlns:a16="http://schemas.microsoft.com/office/drawing/2014/main" id="{03AFADF5-FF19-43B8-AF29-B29D57633BD6}"/>
+                <a16:creationId xmlns:a16="http://schemas.microsoft.com/office/drawing/2014/main" id="{5BD077C3-787F-4F7B-80B6-F34CF164E761}"/>
               </a:ext>
             </a:extLst>
           </p:cNvPr>
@@ -7927,7 +7927,7 @@
           <p:cNvPr id="18" name="">
             <a:extLst xmlns:a="http://schemas.openxmlformats.org/drawingml/2006/main">
               <a:ext uri="{FF2B5EF4-FFF2-40B4-BE49-F238E27FC236}">
-                <a16:creationId xmlns:a16="http://schemas.microsoft.com/office/drawing/2014/main" id="{D7A8FFA2-D7F7-4A9D-BC0E-DF44239B3718}"/>
+                <a16:creationId xmlns:a16="http://schemas.microsoft.com/office/drawing/2014/main" id="{1F3BECBE-4604-4547-98F0-554182361E71}"/>
               </a:ext>
             </a:extLst>
           </p:cNvPr>
@@ -7972,7 +7972,7 @@
           <p:cNvPr id="19" name="">
             <a:extLst xmlns:a="http://schemas.openxmlformats.org/drawingml/2006/main">
               <a:ext uri="{FF2B5EF4-FFF2-40B4-BE49-F238E27FC236}">
-                <a16:creationId xmlns:a16="http://schemas.microsoft.com/office/drawing/2014/main" id="{FF0168D8-D57C-478E-8DF3-820F96C13DC6}"/>
+                <a16:creationId xmlns:a16="http://schemas.microsoft.com/office/drawing/2014/main" id="{14C91F3A-35F6-471D-882A-D2684DB96D86}"/>
               </a:ext>
             </a:extLst>
           </p:cNvPr>
@@ -8001,7 +8001,7 @@
           <p:cNvPr id="20" name="">
             <a:extLst xmlns:a="http://schemas.openxmlformats.org/drawingml/2006/main">
               <a:ext uri="{FF2B5EF4-FFF2-40B4-BE49-F238E27FC236}">
-                <a16:creationId xmlns:a16="http://schemas.microsoft.com/office/drawing/2014/main" id="{D3600782-6DA5-4E13-96D6-D7258BD09B78}"/>
+                <a16:creationId xmlns:a16="http://schemas.microsoft.com/office/drawing/2014/main" id="{CB910DB4-A028-4E60-8613-40A46A507618}"/>
               </a:ext>
             </a:extLst>
           </p:cNvPr>
@@ -8046,7 +8046,7 @@
           <p:cNvPr id="21" name="footer">
             <a:extLst xmlns:a="http://schemas.openxmlformats.org/drawingml/2006/main">
               <a:ext uri="{FF2B5EF4-FFF2-40B4-BE49-F238E27FC236}">
-                <a16:creationId xmlns:a16="http://schemas.microsoft.com/office/drawing/2014/main" id="{C89DAADD-2255-4DCA-9D2F-25F5FA71FBE5}"/>
+                <a16:creationId xmlns:a16="http://schemas.microsoft.com/office/drawing/2014/main" id="{490E4634-7829-4A15-8B57-A06C3BEE649A}"/>
               </a:ext>
             </a:extLst>
           </p:cNvPr>
@@ -8089,7 +8089,7 @@
     </p:spTree>
     <p:extLst>
       <p:ext uri="{BB962C8B-B14F-4D97-AF65-F5344CB8AC3E}">
-        <p14:creationId xmlns:p14="http://schemas.microsoft.com/office/powerpoint/2010/main" val="19820895"/>
+        <p14:creationId xmlns:p14="http://schemas.microsoft.com/office/powerpoint/2010/main" val="773600222"/>
       </p:ext>
     </p:extLst>
   </p:cSld>
